--- a/output/report_template_structure.pptx
+++ b/output/report_template_structure.pptx
@@ -6,6 +6,7 @@
   </p:sldMasterIdLst>
   <p:sldIdLst>
     <p:sldId id="256" r:id="rId7"/>
+    <p:sldId id="257" r:id="rId8"/>
   </p:sldIdLst>
   <p:sldSz cx="12193200" cy="6858000" type="screen4x3"/>
   <p:notesSz cx="6858000" cy="9144000"/>
@@ -3225,7 +3226,7 @@
         </p:nvSpPr>
         <p:spPr>
           <a:xfrm>
-            <a:off x="5993999" y="900000"/>
+            <a:off x="5040000" y="900000"/>
             <a:ext cx="21600" cy="5724000"/>
           </a:xfrm>
           <a:prstGeom prst="rect">
@@ -3277,12 +3278,16 @@
           <a:noFill/>
         </p:spPr>
         <p:txBody>
-          <a:bodyPr wrap="none">
+          <a:bodyPr wrap="square">
             <a:spAutoFit/>
           </a:bodyPr>
           <a:lstStyle/>
           <a:p>
-            <a:pPr algn="l"/>
+            <a:pPr algn="l">
+              <a:spcAft>
+                <a:spcPts val="200"/>
+              </a:spcAft>
+            </a:pPr>
             <a:r>
               <a:rPr sz="2000" b="1">
                 <a:solidFill>
@@ -3290,7 +3295,7 @@
                 </a:solidFill>
                 <a:latin typeface="微软雅黑"/>
               </a:rPr>
-              <a:t>智能报告模板系统  ·  数据结构定义</a:t>
+              <a:t>智能报告模板系统  ·  整体目录与章节结构 (v2.0)</a:t>
             </a:r>
           </a:p>
         </p:txBody>
@@ -3303,8 +3308,8 @@
         </p:nvSpPr>
         <p:spPr>
           <a:xfrm>
-            <a:off x="360000" y="576000"/>
-            <a:ext cx="11520000" cy="234000"/>
+            <a:off x="360000" y="522000"/>
+            <a:ext cx="11520000" cy="288000"/>
           </a:xfrm>
           <a:prstGeom prst="rect">
             <a:avLst/>
@@ -3312,20 +3317,24 @@
           <a:noFill/>
         </p:spPr>
         <p:txBody>
-          <a:bodyPr wrap="none">
+          <a:bodyPr wrap="square">
             <a:spAutoFit/>
           </a:bodyPr>
           <a:lstStyle/>
           <a:p>
-            <a:pPr algn="l"/>
-            <a:r>
-              <a:rPr sz="750" b="0">
+            <a:pPr algn="l">
+              <a:spcAft>
+                <a:spcPts val="200"/>
+              </a:spcAft>
+            </a:pPr>
+            <a:r>
+              <a:rPr sz="800" b="0">
                 <a:solidFill>
                   <a:srgbClr val="FFCCCC"/>
                 </a:solidFill>
                 <a:latin typeface="微软雅黑"/>
               </a:rPr>
-              <a:t>Template Root  |  Parameter  |  Section  |  Content Source  |  Presentation  |  Composite Table Layout</a:t>
+              <a:t>Template Root  |  Parameters  |  Sections Tree  |  Content Model  |  v2.0 数据-展示解耦呈现</a:t>
             </a:r>
           </a:p>
         </p:txBody>
@@ -3347,12 +3356,16 @@
           <a:noFill/>
         </p:spPr>
         <p:txBody>
-          <a:bodyPr wrap="none">
+          <a:bodyPr wrap="square">
             <a:spAutoFit/>
           </a:bodyPr>
           <a:lstStyle/>
           <a:p>
-            <a:pPr algn="l"/>
+            <a:pPr algn="l">
+              <a:spcAft>
+                <a:spcPts val="200"/>
+              </a:spcAft>
+            </a:pPr>
             <a:r>
               <a:rPr sz="700" b="0">
                 <a:solidFill>
@@ -3360,7 +3373,7 @@
                 </a:solidFill>
                 <a:latin typeface="微软雅黑"/>
               </a:rPr>
-              <a:t>© Report Template System v1.0  |  2026-03</a:t>
+              <a:t>© Report Template System v2.0  |  2026-03</a:t>
             </a:r>
           </a:p>
         </p:txBody>
@@ -3373,7 +3386,7 @@
         </p:nvSpPr>
         <p:spPr>
           <a:xfrm>
-            <a:off x="180000" y="939600"/>
+            <a:off x="180000" y="1004400"/>
             <a:ext cx="64800" cy="158400"/>
           </a:xfrm>
           <a:prstGeom prst="rect">
@@ -3416,7 +3429,7 @@
         </p:nvSpPr>
         <p:spPr>
           <a:xfrm>
-            <a:off x="280800" y="907200"/>
+            <a:off x="280800" y="961200"/>
             <a:ext cx="5400000" cy="208800"/>
           </a:xfrm>
           <a:prstGeom prst="rect">
@@ -3425,527 +3438,94 @@
           <a:noFill/>
         </p:spPr>
         <p:txBody>
-          <a:bodyPr wrap="none">
+          <a:bodyPr wrap="square">
             <a:spAutoFit/>
           </a:bodyPr>
           <a:lstStyle/>
           <a:p>
-            <a:pPr algn="l"/>
-            <a:r>
-              <a:rPr sz="850" b="1">
+            <a:pPr algn="l">
+              <a:spcAft>
+                <a:spcPts val="200"/>
+              </a:spcAft>
+            </a:pPr>
+            <a:r>
+              <a:rPr sz="900" b="1">
                 <a:solidFill>
                   <a:srgbClr val="C7000F"/>
                 </a:solidFill>
                 <a:latin typeface="微软雅黑"/>
               </a:rPr>
-              <a:t>模板根字段（Template Root）</a:t>
-            </a:r>
-          </a:p>
-        </p:txBody>
-      </p:sp>
-      <p:graphicFrame>
-        <p:nvGraphicFramePr>
-          <p:cNvPr id="11" name="Table 10"/>
-          <p:cNvGraphicFramePr>
-            <a:graphicFrameLocks noGrp="1"/>
-          </p:cNvGraphicFramePr>
+              <a:t>模板整体树状结构 (YAML)</a:t>
+            </a:r>
+          </a:p>
+        </p:txBody>
+      </p:sp>
+      <p:sp>
+        <p:nvSpPr>
+          <p:cNvPr id="11" name="TextBox 10"/>
+          <p:cNvSpPr txBox="1"/>
           <p:nvPr/>
-        </p:nvGraphicFramePr>
-        <p:xfrm>
-          <a:off x="180000" y="1123200"/>
-          <a:ext cx="5651998" cy="1386000"/>
-        </p:xfrm>
-        <a:graphic>
-          <a:graphicData uri="http://schemas.openxmlformats.org/drawingml/2006/table">
-            <a:tbl>
-              <a:tblPr firstRow="1" bandRow="1">
-                <a:tableStyleId>{5C22544A-7EE6-4342-B048-85BDC9FD1C3A}</a:tableStyleId>
-              </a:tblPr>
-              <a:tblGrid>
-                <a:gridCol w="904320"/>
-                <a:gridCol w="508679"/>
-                <a:gridCol w="4238999"/>
-              </a:tblGrid>
-              <a:tr h="198000">
-                <a:tc>
-                  <a:txBody>
-                    <a:bodyPr wrap="square"/>
-                    <a:lstStyle/>
-                    <a:p>
-                      <a:r>
-                        <a:rPr sz="750" b="1">
-                          <a:solidFill>
-                            <a:srgbClr val="FFFFFF"/>
-                          </a:solidFill>
-                          <a:latin typeface="微软雅黑"/>
-                        </a:rPr>
-                        <a:t>字段</a:t>
-                      </a:r>
-                    </a:p>
-                  </a:txBody>
-                  <a:tcPr marL="36000" marR="21600" marT="14400" marB="14400">
-                    <a:solidFill>
-                      <a:srgbClr val="C7000F"/>
-                    </a:solidFill>
-                  </a:tcPr>
-                </a:tc>
-                <a:tc>
-                  <a:txBody>
-                    <a:bodyPr wrap="square"/>
-                    <a:lstStyle/>
-                    <a:p>
-                      <a:r>
-                        <a:rPr sz="750" b="1">
-                          <a:solidFill>
-                            <a:srgbClr val="FFFFFF"/>
-                          </a:solidFill>
-                          <a:latin typeface="微软雅黑"/>
-                        </a:rPr>
-                        <a:t>类型</a:t>
-                      </a:r>
-                    </a:p>
-                  </a:txBody>
-                  <a:tcPr marL="36000" marR="21600" marT="14400" marB="14400">
-                    <a:solidFill>
-                      <a:srgbClr val="C7000F"/>
-                    </a:solidFill>
-                  </a:tcPr>
-                </a:tc>
-                <a:tc>
-                  <a:txBody>
-                    <a:bodyPr wrap="square"/>
-                    <a:lstStyle/>
-                    <a:p>
-                      <a:r>
-                        <a:rPr sz="750" b="1">
-                          <a:solidFill>
-                            <a:srgbClr val="FFFFFF"/>
-                          </a:solidFill>
-                          <a:latin typeface="微软雅黑"/>
-                        </a:rPr>
-                        <a:t>说明</a:t>
-                      </a:r>
-                    </a:p>
-                  </a:txBody>
-                  <a:tcPr marL="36000" marR="21600" marT="14400" marB="14400">
-                    <a:solidFill>
-                      <a:srgbClr val="C7000F"/>
-                    </a:solidFill>
-                  </a:tcPr>
-                </a:tc>
-              </a:tr>
-              <a:tr h="198000">
-                <a:tc>
-                  <a:txBody>
-                    <a:bodyPr wrap="square"/>
-                    <a:lstStyle/>
-                    <a:p>
-                      <a:r>
-                        <a:rPr sz="750" b="0">
-                          <a:solidFill>
-                            <a:srgbClr val="1F1F1F"/>
-                          </a:solidFill>
-                          <a:latin typeface="微软雅黑"/>
-                        </a:rPr>
-                        <a:t>id</a:t>
-                      </a:r>
-                    </a:p>
-                  </a:txBody>
-                  <a:tcPr marL="36000" marR="21600" marT="14400" marB="14400">
-                    <a:solidFill>
-                      <a:srgbClr val="FFFFFF"/>
-                    </a:solidFill>
-                  </a:tcPr>
-                </a:tc>
-                <a:tc>
-                  <a:txBody>
-                    <a:bodyPr wrap="square"/>
-                    <a:lstStyle/>
-                    <a:p>
-                      <a:r>
-                        <a:rPr sz="750" b="0">
-                          <a:solidFill>
-                            <a:srgbClr val="1F1F1F"/>
-                          </a:solidFill>
-                          <a:latin typeface="微软雅黑"/>
-                        </a:rPr>
-                        <a:t>string</a:t>
-                      </a:r>
-                    </a:p>
-                  </a:txBody>
-                  <a:tcPr marL="36000" marR="21600" marT="14400" marB="14400">
-                    <a:solidFill>
-                      <a:srgbClr val="FFFFFF"/>
-                    </a:solidFill>
-                  </a:tcPr>
-                </a:tc>
-                <a:tc>
-                  <a:txBody>
-                    <a:bodyPr wrap="square"/>
-                    <a:lstStyle/>
-                    <a:p>
-                      <a:r>
-                        <a:rPr sz="750" b="0">
-                          <a:solidFill>
-                            <a:srgbClr val="1F1F1F"/>
-                          </a:solidFill>
-                          <a:latin typeface="微软雅黑"/>
-                        </a:rPr>
-                        <a:t>模板唯一标识（a-z / 0-9 / _）</a:t>
-                      </a:r>
-                    </a:p>
-                  </a:txBody>
-                  <a:tcPr marL="36000" marR="21600" marT="14400" marB="14400">
-                    <a:solidFill>
-                      <a:srgbClr val="FFFFFF"/>
-                    </a:solidFill>
-                  </a:tcPr>
-                </a:tc>
-              </a:tr>
-              <a:tr h="198000">
-                <a:tc>
-                  <a:txBody>
-                    <a:bodyPr wrap="square"/>
-                    <a:lstStyle/>
-                    <a:p>
-                      <a:r>
-                        <a:rPr sz="750" b="0">
-                          <a:solidFill>
-                            <a:srgbClr val="1F1F1F"/>
-                          </a:solidFill>
-                          <a:latin typeface="微软雅黑"/>
-                        </a:rPr>
-                        <a:t>type</a:t>
-                      </a:r>
-                    </a:p>
-                  </a:txBody>
-                  <a:tcPr marL="36000" marR="21600" marT="14400" marB="14400">
-                    <a:solidFill>
-                      <a:srgbClr val="F5F5F5"/>
-                    </a:solidFill>
-                  </a:tcPr>
-                </a:tc>
-                <a:tc>
-                  <a:txBody>
-                    <a:bodyPr wrap="square"/>
-                    <a:lstStyle/>
-                    <a:p>
-                      <a:r>
-                        <a:rPr sz="750" b="0">
-                          <a:solidFill>
-                            <a:srgbClr val="1F1F1F"/>
-                          </a:solidFill>
-                          <a:latin typeface="微软雅黑"/>
-                        </a:rPr>
-                        <a:t>string</a:t>
-                      </a:r>
-                    </a:p>
-                  </a:txBody>
-                  <a:tcPr marL="36000" marR="21600" marT="14400" marB="14400">
-                    <a:solidFill>
-                      <a:srgbClr val="F5F5F5"/>
-                    </a:solidFill>
-                  </a:tcPr>
-                </a:tc>
-                <a:tc>
-                  <a:txBody>
-                    <a:bodyPr wrap="square"/>
-                    <a:lstStyle/>
-                    <a:p>
-                      <a:r>
-                        <a:rPr sz="750" b="0">
-                          <a:solidFill>
-                            <a:srgbClr val="1F1F1F"/>
-                          </a:solidFill>
-                          <a:latin typeface="微软雅黑"/>
-                        </a:rPr>
-                        <a:t>报告类型（如：设备健康评估）</a:t>
-                      </a:r>
-                    </a:p>
-                  </a:txBody>
-                  <a:tcPr marL="36000" marR="21600" marT="14400" marB="14400">
-                    <a:solidFill>
-                      <a:srgbClr val="F5F5F5"/>
-                    </a:solidFill>
-                  </a:tcPr>
-                </a:tc>
-              </a:tr>
-              <a:tr h="198000">
-                <a:tc>
-                  <a:txBody>
-                    <a:bodyPr wrap="square"/>
-                    <a:lstStyle/>
-                    <a:p>
-                      <a:r>
-                        <a:rPr sz="750" b="0">
-                          <a:solidFill>
-                            <a:srgbClr val="1F1F1F"/>
-                          </a:solidFill>
-                          <a:latin typeface="微软雅黑"/>
-                        </a:rPr>
-                        <a:t>scene</a:t>
-                      </a:r>
-                    </a:p>
-                  </a:txBody>
-                  <a:tcPr marL="36000" marR="21600" marT="14400" marB="14400">
-                    <a:solidFill>
-                      <a:srgbClr val="FFFFFF"/>
-                    </a:solidFill>
-                  </a:tcPr>
-                </a:tc>
-                <a:tc>
-                  <a:txBody>
-                    <a:bodyPr wrap="square"/>
-                    <a:lstStyle/>
-                    <a:p>
-                      <a:r>
-                        <a:rPr sz="750" b="0">
-                          <a:solidFill>
-                            <a:srgbClr val="1F1F1F"/>
-                          </a:solidFill>
-                          <a:latin typeface="微软雅黑"/>
-                        </a:rPr>
-                        <a:t>string</a:t>
-                      </a:r>
-                    </a:p>
-                  </a:txBody>
-                  <a:tcPr marL="36000" marR="21600" marT="14400" marB="14400">
-                    <a:solidFill>
-                      <a:srgbClr val="FFFFFF"/>
-                    </a:solidFill>
-                  </a:tcPr>
-                </a:tc>
-                <a:tc>
-                  <a:txBody>
-                    <a:bodyPr wrap="square"/>
-                    <a:lstStyle/>
-                    <a:p>
-                      <a:r>
-                        <a:rPr sz="750" b="0">
-                          <a:solidFill>
-                            <a:srgbClr val="1F1F1F"/>
-                          </a:solidFill>
-                          <a:latin typeface="微软雅黑"/>
-                        </a:rPr>
-                        <a:t>场景细分（如：总部）</a:t>
-                      </a:r>
-                    </a:p>
-                  </a:txBody>
-                  <a:tcPr marL="36000" marR="21600" marT="14400" marB="14400">
-                    <a:solidFill>
-                      <a:srgbClr val="FFFFFF"/>
-                    </a:solidFill>
-                  </a:tcPr>
-                </a:tc>
-              </a:tr>
-              <a:tr h="198000">
-                <a:tc>
-                  <a:txBody>
-                    <a:bodyPr wrap="square"/>
-                    <a:lstStyle/>
-                    <a:p>
-                      <a:r>
-                        <a:rPr sz="750" b="0">
-                          <a:solidFill>
-                            <a:srgbClr val="1F1F1F"/>
-                          </a:solidFill>
-                          <a:latin typeface="微软雅黑"/>
-                        </a:rPr>
-                        <a:t>name</a:t>
-                      </a:r>
-                    </a:p>
-                  </a:txBody>
-                  <a:tcPr marL="36000" marR="21600" marT="14400" marB="14400">
-                    <a:solidFill>
-                      <a:srgbClr val="F5F5F5"/>
-                    </a:solidFill>
-                  </a:tcPr>
-                </a:tc>
-                <a:tc>
-                  <a:txBody>
-                    <a:bodyPr wrap="square"/>
-                    <a:lstStyle/>
-                    <a:p>
-                      <a:r>
-                        <a:rPr sz="750" b="0">
-                          <a:solidFill>
-                            <a:srgbClr val="1F1F1F"/>
-                          </a:solidFill>
-                          <a:latin typeface="微软雅黑"/>
-                        </a:rPr>
-                        <a:t>string</a:t>
-                      </a:r>
-                    </a:p>
-                  </a:txBody>
-                  <a:tcPr marL="36000" marR="21600" marT="14400" marB="14400">
-                    <a:solidFill>
-                      <a:srgbClr val="F5F5F5"/>
-                    </a:solidFill>
-                  </a:tcPr>
-                </a:tc>
-                <a:tc>
-                  <a:txBody>
-                    <a:bodyPr wrap="square"/>
-                    <a:lstStyle/>
-                    <a:p>
-                      <a:r>
-                        <a:rPr sz="750" b="0">
-                          <a:solidFill>
-                            <a:srgbClr val="1F1F1F"/>
-                          </a:solidFill>
-                          <a:latin typeface="微软雅黑"/>
-                        </a:rPr>
-                        <a:t>模板展示名称</a:t>
-                      </a:r>
-                    </a:p>
-                  </a:txBody>
-                  <a:tcPr marL="36000" marR="21600" marT="14400" marB="14400">
-                    <a:solidFill>
-                      <a:srgbClr val="F5F5F5"/>
-                    </a:solidFill>
-                  </a:tcPr>
-                </a:tc>
-              </a:tr>
-              <a:tr h="198000">
-                <a:tc>
-                  <a:txBody>
-                    <a:bodyPr wrap="square"/>
-                    <a:lstStyle/>
-                    <a:p>
-                      <a:r>
-                        <a:rPr sz="750" b="0">
-                          <a:solidFill>
-                            <a:srgbClr val="1F1F1F"/>
-                          </a:solidFill>
-                          <a:latin typeface="微软雅黑"/>
-                        </a:rPr>
-                        <a:t>parameters[]</a:t>
-                      </a:r>
-                    </a:p>
-                  </a:txBody>
-                  <a:tcPr marL="36000" marR="21600" marT="14400" marB="14400">
-                    <a:solidFill>
-                      <a:srgbClr val="FFFFFF"/>
-                    </a:solidFill>
-                  </a:tcPr>
-                </a:tc>
-                <a:tc>
-                  <a:txBody>
-                    <a:bodyPr wrap="square"/>
-                    <a:lstStyle/>
-                    <a:p>
-                      <a:r>
-                        <a:rPr sz="750" b="0">
-                          <a:solidFill>
-                            <a:srgbClr val="1F1F1F"/>
-                          </a:solidFill>
-                          <a:latin typeface="微软雅黑"/>
-                        </a:rPr>
-                        <a:t>array</a:t>
-                      </a:r>
-                    </a:p>
-                  </a:txBody>
-                  <a:tcPr marL="36000" marR="21600" marT="14400" marB="14400">
-                    <a:solidFill>
-                      <a:srgbClr val="FFFFFF"/>
-                    </a:solidFill>
-                  </a:tcPr>
-                </a:tc>
-                <a:tc>
-                  <a:txBody>
-                    <a:bodyPr wrap="square"/>
-                    <a:lstStyle/>
-                    <a:p>
-                      <a:r>
-                        <a:rPr sz="750" b="0">
-                          <a:solidFill>
-                            <a:srgbClr val="1F1F1F"/>
-                          </a:solidFill>
-                          <a:latin typeface="微软雅黑"/>
-                        </a:rPr>
-                        <a:t>参数定义列表（详见「参数」表）</a:t>
-                      </a:r>
-                    </a:p>
-                  </a:txBody>
-                  <a:tcPr marL="36000" marR="21600" marT="14400" marB="14400">
-                    <a:solidFill>
-                      <a:srgbClr val="FFFFFF"/>
-                    </a:solidFill>
-                  </a:tcPr>
-                </a:tc>
-              </a:tr>
-              <a:tr h="198000">
-                <a:tc>
-                  <a:txBody>
-                    <a:bodyPr wrap="square"/>
-                    <a:lstStyle/>
-                    <a:p>
-                      <a:r>
-                        <a:rPr sz="750" b="0">
-                          <a:solidFill>
-                            <a:srgbClr val="1F1F1F"/>
-                          </a:solidFill>
-                          <a:latin typeface="微软雅黑"/>
-                        </a:rPr>
-                        <a:t>sections[]</a:t>
-                      </a:r>
-                    </a:p>
-                  </a:txBody>
-                  <a:tcPr marL="36000" marR="21600" marT="14400" marB="14400">
-                    <a:solidFill>
-                      <a:srgbClr val="F5F5F5"/>
-                    </a:solidFill>
-                  </a:tcPr>
-                </a:tc>
-                <a:tc>
-                  <a:txBody>
-                    <a:bodyPr wrap="square"/>
-                    <a:lstStyle/>
-                    <a:p>
-                      <a:r>
-                        <a:rPr sz="750" b="0">
-                          <a:solidFill>
-                            <a:srgbClr val="1F1F1F"/>
-                          </a:solidFill>
-                          <a:latin typeface="微软雅黑"/>
-                        </a:rPr>
-                        <a:t>array</a:t>
-                      </a:r>
-                    </a:p>
-                  </a:txBody>
-                  <a:tcPr marL="36000" marR="21600" marT="14400" marB="14400">
-                    <a:solidFill>
-                      <a:srgbClr val="F5F5F5"/>
-                    </a:solidFill>
-                  </a:tcPr>
-                </a:tc>
-                <a:tc>
-                  <a:txBody>
-                    <a:bodyPr wrap="square"/>
-                    <a:lstStyle/>
-                    <a:p>
-                      <a:r>
-                        <a:rPr sz="750" b="0">
-                          <a:solidFill>
-                            <a:srgbClr val="1F1F1F"/>
-                          </a:solidFill>
-                          <a:latin typeface="微软雅黑"/>
-                        </a:rPr>
-                        <a:t>报告章节树（可多级嵌套，详见「章节」表）</a:t>
-                      </a:r>
-                    </a:p>
-                  </a:txBody>
-                  <a:tcPr marL="36000" marR="21600" marT="14400" marB="14400">
-                    <a:solidFill>
-                      <a:srgbClr val="F5F5F5"/>
-                    </a:solidFill>
-                  </a:tcPr>
-                </a:tc>
-              </a:tr>
-            </a:tbl>
-          </a:graphicData>
-        </a:graphic>
-      </p:graphicFrame>
+        </p:nvSpPr>
+        <p:spPr>
+          <a:xfrm>
+            <a:off x="144000" y="1260000"/>
+            <a:ext cx="4680000" cy="5040000"/>
+          </a:xfrm>
+          <a:prstGeom prst="rect">
+            <a:avLst/>
+          </a:prstGeom>
+          <a:noFill/>
+        </p:spPr>
+        <p:txBody>
+          <a:bodyPr wrap="none">
+            <a:spAutoFit/>
+          </a:bodyPr>
+          <a:lstStyle/>
+          <a:p>
+            <a:pPr algn="l">
+              <a:spcAft>
+                <a:spcPts val="400"/>
+              </a:spcAft>
+            </a:pPr>
+            <a:r>
+              <a:rPr sz="850">
+                <a:solidFill>
+                  <a:srgbClr val="1F1F1F"/>
+                </a:solidFill>
+                <a:latin typeface="Consolas"/>
+              </a:rPr>
+              <a:t>[Template Root]
+ ├── id: string                 (唯一标识)
+ ├── type: string               (报告类型)
+ ├── scene: string              (适用场景)
+ ├── name: string               (展示名称)
+ ├── parameters[]: array
+ │    ├── id: string            (参数占位符 {param_id})
+ │    ├── label: string
+ │    ├── required: boolean
+ │    ├── input_type: enum      (free_text | enum | dynamic)
+ │    ├── multi: boolean        (允许多值则可做foreach)
+ │    ├── options[]: array
+ │    └── source: string
+ └── sections[]: array          (递归章节树)
+      ├── title: string         (支持 {param})
+      ├── foreach: object
+      │    ├── param: string    (绑定的已收集多值参数)
+      │    └── as: string       (迭代变量名 {$varname})
+      ├── subsections[]: array  (子章节嵌套)
+      │    └── ...
+      └── content: object       (章节叶子节点)
+           ├── datasets[]       (★ v2.0 局部数据池)
+           │    ├── id: string  (局部唯一)
+           │    ├── depends_on: string[] (局部DAG依赖)
+           │    └── source      (数据获取)
+           └── presentation     (★ v2.0 视图呈现)
+                ├── type: enum  (text | chart | simple_table | composite)
+                └── ...</a:t>
+            </a:r>
+          </a:p>
+        </p:txBody>
+      </p:sp>
       <p:sp>
         <p:nvSpPr>
           <p:cNvPr id="12" name="Rectangle 11"/>
@@ -3954,7 +3534,7 @@
         </p:nvSpPr>
         <p:spPr>
           <a:xfrm>
-            <a:off x="180000" y="2631600"/>
+            <a:off x="5220000" y="1004400"/>
             <a:ext cx="64800" cy="158400"/>
           </a:xfrm>
           <a:prstGeom prst="rect">
@@ -3997,8 +3577,8 @@
         </p:nvSpPr>
         <p:spPr>
           <a:xfrm>
-            <a:off x="280800" y="2599200"/>
-            <a:ext cx="5400000" cy="208800"/>
+            <a:off x="5320800" y="961200"/>
+            <a:ext cx="6768000" cy="208800"/>
           </a:xfrm>
           <a:prstGeom prst="rect">
             <a:avLst/>
@@ -4006,20 +3586,24 @@
           <a:noFill/>
         </p:spPr>
         <p:txBody>
-          <a:bodyPr wrap="none">
+          <a:bodyPr wrap="square">
             <a:spAutoFit/>
           </a:bodyPr>
           <a:lstStyle/>
           <a:p>
-            <a:pPr algn="l"/>
-            <a:r>
-              <a:rPr sz="850" b="1">
+            <a:pPr algn="l">
+              <a:spcAft>
+                <a:spcPts val="200"/>
+              </a:spcAft>
+            </a:pPr>
+            <a:r>
+              <a:rPr sz="900" b="1">
                 <a:solidFill>
                   <a:srgbClr val="C7000F"/>
                 </a:solidFill>
                 <a:latin typeface="微软雅黑"/>
               </a:rPr>
-              <a:t>章节结构（sections[] 字段）</a:t>
+              <a:t>1. 参数体系与用户交互 (parameters)</a:t>
             </a:r>
           </a:p>
         </p:txBody>
@@ -4033,8 +3617,8 @@
           <p:nvPr/>
         </p:nvGraphicFramePr>
         <p:xfrm>
-          <a:off x="180000" y="2815200"/>
-          <a:ext cx="5652000" cy="1548000"/>
+          <a:off x="5220000" y="1188000"/>
+          <a:ext cx="6768000" cy="648000"/>
         </p:xfrm>
         <a:graphic>
           <a:graphicData uri="http://schemas.openxmlformats.org/drawingml/2006/table">
@@ -4043,27 +3627,28 @@
                 <a:tableStyleId>{5C22544A-7EE6-4342-B048-85BDC9FD1C3A}</a:tableStyleId>
               </a:tblPr>
               <a:tblGrid>
-                <a:gridCol w="1356480"/>
-                <a:gridCol w="4295520"/>
+                <a:gridCol w="1015200"/>
+                <a:gridCol w="3045600"/>
+                <a:gridCol w="2707200"/>
               </a:tblGrid>
-              <a:tr h="193500">
+              <a:tr h="162000">
                 <a:tc>
                   <a:txBody>
                     <a:bodyPr wrap="square"/>
                     <a:lstStyle/>
                     <a:p>
                       <a:r>
-                        <a:rPr sz="750" b="1">
+                        <a:rPr sz="800" b="1">
                           <a:solidFill>
                             <a:srgbClr val="FFFFFF"/>
                           </a:solidFill>
                           <a:latin typeface="微软雅黑"/>
                         </a:rPr>
-                        <a:t>字段</a:t>
+                        <a:t>input_type</a:t>
                       </a:r>
                     </a:p>
                   </a:txBody>
-                  <a:tcPr marL="36000" marR="21600" marT="14400" marB="14400">
+                  <a:tcPr marL="43200" marR="21600" marT="36000" marB="36000">
                     <a:solidFill>
                       <a:srgbClr val="C7000F"/>
                     </a:solidFill>
@@ -4075,7 +3660,7 @@
                     <a:lstStyle/>
                     <a:p>
                       <a:r>
-                        <a:rPr sz="750" b="1">
+                        <a:rPr sz="800" b="1">
                           <a:solidFill>
                             <a:srgbClr val="FFFFFF"/>
                           </a:solidFill>
@@ -4085,31 +3670,53 @@
                       </a:r>
                     </a:p>
                   </a:txBody>
-                  <a:tcPr marL="36000" marR="21600" marT="14400" marB="14400">
+                  <a:tcPr marL="43200" marR="21600" marT="36000" marB="36000">
+                    <a:solidFill>
+                      <a:srgbClr val="C7000F"/>
+                    </a:solidFill>
+                  </a:tcPr>
+                </a:tc>
+                <a:tc>
+                  <a:txBody>
+                    <a:bodyPr wrap="square"/>
+                    <a:lstStyle/>
+                    <a:p>
+                      <a:r>
+                        <a:rPr sz="800" b="1">
+                          <a:solidFill>
+                            <a:srgbClr val="FFFFFF"/>
+                          </a:solidFill>
+                          <a:latin typeface="微软雅黑"/>
+                        </a:rPr>
+                        <a:t>提取流程</a:t>
+                      </a:r>
+                    </a:p>
+                  </a:txBody>
+                  <a:tcPr marL="43200" marR="21600" marT="36000" marB="36000">
                     <a:solidFill>
                       <a:srgbClr val="C7000F"/>
                     </a:solidFill>
                   </a:tcPr>
                 </a:tc>
               </a:tr>
-              <a:tr h="193500">
+              <a:tr h="162000">
                 <a:tc>
                   <a:txBody>
                     <a:bodyPr wrap="square"/>
                     <a:lstStyle/>
                     <a:p>
                       <a:r>
-                        <a:rPr sz="750" b="0">
+                        <a:rPr sz="800" b="0">
                           <a:solidFill>
                             <a:srgbClr val="1F1F1F"/>
                           </a:solidFill>
                           <a:latin typeface="微软雅黑"/>
                         </a:rPr>
-                        <a:t>id</a:t>
+                        <a:t>free_text</a:t>
                       </a:r>
                     </a:p>
                   </a:txBody>
-                  <a:tcPr marL="36000" marR="21600" marT="14400" marB="14400">
+                  <a:tcPr marL="43200" marR="21600" marT="36000" marB="36000">
                     <a:solidFill>
                       <a:srgbClr val="FFFFFF"/>
                     </a:solidFill>
@@ -4121,41 +3728,63 @@
                     <a:lstStyle/>
                     <a:p>
                       <a:r>
-                        <a:rPr sz="750" b="0">
+                        <a:rPr sz="800" b="0">
                           <a:solidFill>
                             <a:srgbClr val="1F1F1F"/>
                           </a:solidFill>
                           <a:latin typeface="微软雅黑"/>
                         </a:rPr>
-                        <a:t>区段标识，供 ai_synthesis refs 引用</a:t>
+                        <a:t>自由输入文本</a:t>
                       </a:r>
                     </a:p>
                   </a:txBody>
-                  <a:tcPr marL="36000" marR="21600" marT="14400" marB="14400">
+                  <a:tcPr marL="43200" marR="21600" marT="36000" marB="36000">
+                    <a:solidFill>
+                      <a:srgbClr val="FFFFFF"/>
+                    </a:solidFill>
+                  </a:tcPr>
+                </a:tc>
+                <a:tc>
+                  <a:txBody>
+                    <a:bodyPr wrap="square"/>
+                    <a:lstStyle/>
+                    <a:p>
+                      <a:r>
+                        <a:rPr sz="800" b="0">
+                          <a:solidFill>
+                            <a:srgbClr val="1F1F1F"/>
+                          </a:solidFill>
+                          <a:latin typeface="微软雅黑"/>
+                        </a:rPr>
+                        <a:t>LLM 自动从会话提取</a:t>
+                      </a:r>
+                    </a:p>
+                  </a:txBody>
+                  <a:tcPr marL="43200" marR="21600" marT="36000" marB="36000">
                     <a:solidFill>
                       <a:srgbClr val="FFFFFF"/>
                     </a:solidFill>
                   </a:tcPr>
                 </a:tc>
               </a:tr>
-              <a:tr h="193500">
+              <a:tr h="162000">
                 <a:tc>
                   <a:txBody>
                     <a:bodyPr wrap="square"/>
                     <a:lstStyle/>
                     <a:p>
                       <a:r>
-                        <a:rPr sz="750" b="0">
+                        <a:rPr sz="800" b="0">
                           <a:solidFill>
                             <a:srgbClr val="1F1F1F"/>
                           </a:solidFill>
                           <a:latin typeface="微软雅黑"/>
                         </a:rPr>
-                        <a:t>title</a:t>
+                        <a:t>enum</a:t>
                       </a:r>
                     </a:p>
                   </a:txBody>
-                  <a:tcPr marL="36000" marR="21600" marT="14400" marB="14400">
+                  <a:tcPr marL="43200" marR="21600" marT="36000" marB="36000">
                     <a:solidFill>
                       <a:srgbClr val="F5F5F5"/>
                     </a:solidFill>
@@ -4167,41 +3796,63 @@
                     <a:lstStyle/>
                     <a:p>
                       <a:r>
-                        <a:rPr sz="750" b="0">
+                        <a:rPr sz="800" b="0">
                           <a:solidFill>
                             <a:srgbClr val="1F1F1F"/>
                           </a:solidFill>
                           <a:latin typeface="微软雅黑"/>
                         </a:rPr>
-                        <a:t>章节标题，支持 {param} / {$var} 占位符</a:t>
+                        <a:t>有限枚举选项 (声明 options)</a:t>
                       </a:r>
                     </a:p>
                   </a:txBody>
-                  <a:tcPr marL="36000" marR="21600" marT="14400" marB="14400">
+                  <a:tcPr marL="43200" marR="21600" marT="36000" marB="36000">
+                    <a:solidFill>
+                      <a:srgbClr val="F5F5F5"/>
+                    </a:solidFill>
+                  </a:tcPr>
+                </a:tc>
+                <a:tc>
+                  <a:txBody>
+                    <a:bodyPr wrap="square"/>
+                    <a:lstStyle/>
+                    <a:p>
+                      <a:r>
+                        <a:rPr sz="800" b="0">
+                          <a:solidFill>
+                            <a:srgbClr val="1F1F1F"/>
+                          </a:solidFill>
+                          <a:latin typeface="微软雅黑"/>
+                        </a:rPr>
+                        <a:t>匹配/提示</a:t>
+                      </a:r>
+                    </a:p>
+                  </a:txBody>
+                  <a:tcPr marL="43200" marR="21600" marT="36000" marB="36000">
                     <a:solidFill>
                       <a:srgbClr val="F5F5F5"/>
                     </a:solidFill>
                   </a:tcPr>
                 </a:tc>
               </a:tr>
-              <a:tr h="193500">
+              <a:tr h="162000">
                 <a:tc>
                   <a:txBody>
                     <a:bodyPr wrap="square"/>
                     <a:lstStyle/>
                     <a:p>
                       <a:r>
-                        <a:rPr sz="750" b="0">
+                        <a:rPr sz="800" b="0">
                           <a:solidFill>
                             <a:srgbClr val="1F1F1F"/>
                           </a:solidFill>
                           <a:latin typeface="微软雅黑"/>
                         </a:rPr>
-                        <a:t>band</a:t>
+                        <a:t>dynamic</a:t>
                       </a:r>
                     </a:p>
                   </a:txBody>
-                  <a:tcPr marL="36000" marR="21600" marT="14400" marB="14400">
+                  <a:tcPr marL="43200" marR="21600" marT="36000" marB="36000">
                     <a:solidFill>
                       <a:srgbClr val="FFFFFF"/>
                     </a:solidFill>
@@ -4213,87 +3864,17 @@
                     <a:lstStyle/>
                     <a:p>
                       <a:r>
-                        <a:rPr sz="750" b="0">
+                        <a:rPr sz="800" b="0">
                           <a:solidFill>
                             <a:srgbClr val="1F1F1F"/>
                           </a:solidFill>
                           <a:latin typeface="微软雅黑"/>
                         </a:rPr>
-                        <a:t>可选，区段标题行（自动全宽 colspan）</a:t>
+                        <a:t>动态外部来源 (声明 source)</a:t>
                       </a:r>
                     </a:p>
                   </a:txBody>
-                  <a:tcPr marL="36000" marR="21600" marT="14400" marB="14400">
-                    <a:solidFill>
-                      <a:srgbClr val="FFFFFF"/>
-                    </a:solidFill>
-                  </a:tcPr>
-                </a:tc>
-              </a:tr>
-              <a:tr h="193500">
-                <a:tc>
-                  <a:txBody>
-                    <a:bodyPr wrap="square"/>
-                    <a:lstStyle/>
-                    <a:p>
-                      <a:r>
-                        <a:rPr sz="750" b="0">
-                          <a:solidFill>
-                            <a:srgbClr val="1F1F1F"/>
-                          </a:solidFill>
-                          <a:latin typeface="微软雅黑"/>
-                        </a:rPr>
-                        <a:t>foreach.param</a:t>
-                      </a:r>
-                    </a:p>
-                  </a:txBody>
-                  <a:tcPr marL="36000" marR="21600" marT="14400" marB="14400">
-                    <a:solidFill>
-                      <a:srgbClr val="F5F5F5"/>
-                    </a:solidFill>
-                  </a:tcPr>
-                </a:tc>
-                <a:tc>
-                  <a:txBody>
-                    <a:bodyPr wrap="square"/>
-                    <a:lstStyle/>
-                    <a:p>
-                      <a:r>
-                        <a:rPr sz="750" b="0">
-                          <a:solidFill>
-                            <a:srgbClr val="1F1F1F"/>
-                          </a:solidFill>
-                          <a:latin typeface="微软雅黑"/>
-                        </a:rPr>
-                        <a:t>绑定的多值参数 id（需 multi:true），按每值展开章节</a:t>
-                      </a:r>
-                    </a:p>
-                  </a:txBody>
-                  <a:tcPr marL="36000" marR="21600" marT="14400" marB="14400">
-                    <a:solidFill>
-                      <a:srgbClr val="F5F5F5"/>
-                    </a:solidFill>
-                  </a:tcPr>
-                </a:tc>
-              </a:tr>
-              <a:tr h="193500">
-                <a:tc>
-                  <a:txBody>
-                    <a:bodyPr wrap="square"/>
-                    <a:lstStyle/>
-                    <a:p>
-                      <a:r>
-                        <a:rPr sz="750" b="0">
-                          <a:solidFill>
-                            <a:srgbClr val="1F1F1F"/>
-                          </a:solidFill>
-                          <a:latin typeface="微软雅黑"/>
-                        </a:rPr>
-                        <a:t>foreach.as</a:t>
-                      </a:r>
-                    </a:p>
-                  </a:txBody>
-                  <a:tcPr marL="36000" marR="21600" marT="14400" marB="14400">
+                  <a:tcPr marL="43200" marR="21600" marT="36000" marB="36000">
                     <a:solidFill>
                       <a:srgbClr val="FFFFFF"/>
                     </a:solidFill>
@@ -4305,109 +3886,17 @@
                     <a:lstStyle/>
                     <a:p>
                       <a:r>
-                        <a:rPr sz="750" b="0">
+                        <a:rPr sz="800" b="0">
                           <a:solidFill>
                             <a:srgbClr val="1F1F1F"/>
                           </a:solidFill>
                           <a:latin typeface="微软雅黑"/>
                         </a:rPr>
-                        <a:t>迭代变量名，内容中以 {$as} 引用</a:t>
+                        <a:t>执行查询获取后提示</a:t>
                       </a:r>
                     </a:p>
                   </a:txBody>
-                  <a:tcPr marL="36000" marR="21600" marT="14400" marB="14400">
-                    <a:solidFill>
-                      <a:srgbClr val="FFFFFF"/>
-                    </a:solidFill>
-                  </a:tcPr>
-                </a:tc>
-              </a:tr>
-              <a:tr h="193500">
-                <a:tc>
-                  <a:txBody>
-                    <a:bodyPr wrap="square"/>
-                    <a:lstStyle/>
-                    <a:p>
-                      <a:r>
-                        <a:rPr sz="750" b="0">
-                          <a:solidFill>
-                            <a:srgbClr val="1F1F1F"/>
-                          </a:solidFill>
-                          <a:latin typeface="微软雅黑"/>
-                        </a:rPr>
-                        <a:t>content</a:t>
-                      </a:r>
-                    </a:p>
-                  </a:txBody>
-                  <a:tcPr marL="36000" marR="21600" marT="14400" marB="14400">
-                    <a:solidFill>
-                      <a:srgbClr val="F5F5F5"/>
-                    </a:solidFill>
-                  </a:tcPr>
-                </a:tc>
-                <a:tc>
-                  <a:txBody>
-                    <a:bodyPr wrap="square"/>
-                    <a:lstStyle/>
-                    <a:p>
-                      <a:r>
-                        <a:rPr sz="750" b="0">
-                          <a:solidFill>
-                            <a:srgbClr val="1F1F1F"/>
-                          </a:solidFill>
-                          <a:latin typeface="微软雅黑"/>
-                        </a:rPr>
-                        <a:t>叶节点内容（与 subsections 互斥）</a:t>
-                      </a:r>
-                    </a:p>
-                  </a:txBody>
-                  <a:tcPr marL="36000" marR="21600" marT="14400" marB="14400">
-                    <a:solidFill>
-                      <a:srgbClr val="F5F5F5"/>
-                    </a:solidFill>
-                  </a:tcPr>
-                </a:tc>
-              </a:tr>
-              <a:tr h="193500">
-                <a:tc>
-                  <a:txBody>
-                    <a:bodyPr wrap="square"/>
-                    <a:lstStyle/>
-                    <a:p>
-                      <a:r>
-                        <a:rPr sz="750" b="0">
-                          <a:solidFill>
-                            <a:srgbClr val="1F1F1F"/>
-                          </a:solidFill>
-                          <a:latin typeface="微软雅黑"/>
-                        </a:rPr>
-                        <a:t>subsections[]</a:t>
-                      </a:r>
-                    </a:p>
-                  </a:txBody>
-                  <a:tcPr marL="36000" marR="21600" marT="14400" marB="14400">
-                    <a:solidFill>
-                      <a:srgbClr val="FFFFFF"/>
-                    </a:solidFill>
-                  </a:tcPr>
-                </a:tc>
-                <a:tc>
-                  <a:txBody>
-                    <a:bodyPr wrap="square"/>
-                    <a:lstStyle/>
-                    <a:p>
-                      <a:r>
-                        <a:rPr sz="750" b="0">
-                          <a:solidFill>
-                            <a:srgbClr val="1F1F1F"/>
-                          </a:solidFill>
-                          <a:latin typeface="微软雅黑"/>
-                        </a:rPr>
-                        <a:t>子章节列表（与 content 互斥）</a:t>
-                      </a:r>
-                    </a:p>
-                  </a:txBody>
-                  <a:tcPr marL="36000" marR="21600" marT="14400" marB="14400">
+                  <a:tcPr marL="43200" marR="21600" marT="36000" marB="36000">
                     <a:solidFill>
                       <a:srgbClr val="FFFFFF"/>
                     </a:solidFill>
@@ -4426,7 +3915,7 @@
         </p:nvSpPr>
         <p:spPr>
           <a:xfrm>
-            <a:off x="6120000" y="939600"/>
+            <a:off x="5220000" y="2012400"/>
             <a:ext cx="64800" cy="158400"/>
           </a:xfrm>
           <a:prstGeom prst="rect">
@@ -4469,8 +3958,8 @@
         </p:nvSpPr>
         <p:spPr>
           <a:xfrm>
-            <a:off x="6220800" y="907200"/>
-            <a:ext cx="5868000" cy="208800"/>
+            <a:off x="5320800" y="1969200"/>
+            <a:ext cx="6768000" cy="208800"/>
           </a:xfrm>
           <a:prstGeom prst="rect">
             <a:avLst/>
@@ -4478,35 +3967,78 @@
           <a:noFill/>
         </p:spPr>
         <p:txBody>
-          <a:bodyPr wrap="none">
+          <a:bodyPr wrap="square">
             <a:spAutoFit/>
           </a:bodyPr>
           <a:lstStyle/>
           <a:p>
-            <a:pPr algn="l"/>
-            <a:r>
-              <a:rPr sz="850" b="1">
+            <a:pPr algn="l">
+              <a:spcAft>
+                <a:spcPts val="200"/>
+              </a:spcAft>
+            </a:pPr>
+            <a:r>
+              <a:rPr sz="900" b="1">
                 <a:solidFill>
                   <a:srgbClr val="C7000F"/>
                 </a:solidFill>
                 <a:latin typeface="微软雅黑"/>
               </a:rPr>
-              <a:t>参数定义（parameters[] 字段）</a:t>
+              <a:t>2. 内容叶节点结构 (content v2.0解耦)</a:t>
+            </a:r>
+          </a:p>
+        </p:txBody>
+      </p:sp>
+      <p:sp>
+        <p:nvSpPr>
+          <p:cNvPr id="17" name="TextBox 16"/>
+          <p:cNvSpPr txBox="1"/>
+          <p:nvPr/>
+        </p:nvSpPr>
+        <p:spPr>
+          <a:xfrm>
+            <a:off x="5220000" y="2214000"/>
+            <a:ext cx="6768000" cy="180000"/>
+          </a:xfrm>
+          <a:prstGeom prst="rect">
+            <a:avLst/>
+          </a:prstGeom>
+          <a:noFill/>
+        </p:spPr>
+        <p:txBody>
+          <a:bodyPr wrap="square">
+            <a:spAutoFit/>
+          </a:bodyPr>
+          <a:lstStyle/>
+          <a:p>
+            <a:pPr algn="l">
+              <a:spcAft>
+                <a:spcPts val="200"/>
+              </a:spcAft>
+            </a:pPr>
+            <a:r>
+              <a:rPr sz="850" b="0">
+                <a:solidFill>
+                  <a:srgbClr val="1F1F1F"/>
+                </a:solidFill>
+                <a:latin typeface="微软雅黑"/>
+              </a:rPr>
+              <a:t>v2.0 将 content 节点拆分为分离且平级的两个层级，防止耦合：</a:t>
             </a:r>
           </a:p>
         </p:txBody>
       </p:sp>
       <p:graphicFrame>
         <p:nvGraphicFramePr>
-          <p:cNvPr id="17" name="Table 16"/>
+          <p:cNvPr id="18" name="Table 17"/>
           <p:cNvGraphicFramePr>
             <a:graphicFrameLocks noGrp="1"/>
           </p:cNvGraphicFramePr>
           <p:nvPr/>
         </p:nvGraphicFramePr>
         <p:xfrm>
-          <a:off x="6120000" y="1123200"/>
-          <a:ext cx="5868000" cy="1602000"/>
+          <a:off x="5220000" y="2412000"/>
+          <a:ext cx="6768000" cy="540000"/>
         </p:xfrm>
         <a:graphic>
           <a:graphicData uri="http://schemas.openxmlformats.org/drawingml/2006/table">
@@ -4515,28 +4047,28 @@
                 <a:tableStyleId>{5C22544A-7EE6-4342-B048-85BDC9FD1C3A}</a:tableStyleId>
               </a:tblPr>
               <a:tblGrid>
-                <a:gridCol w="821520"/>
-                <a:gridCol w="410760"/>
-                <a:gridCol w="4635720"/>
+                <a:gridCol w="1082880"/>
+                <a:gridCol w="1082880"/>
+                <a:gridCol w="4602240"/>
               </a:tblGrid>
-              <a:tr h="200250">
+              <a:tr h="180000">
                 <a:tc>
                   <a:txBody>
                     <a:bodyPr wrap="square"/>
                     <a:lstStyle/>
                     <a:p>
                       <a:r>
-                        <a:rPr sz="750" b="1">
+                        <a:rPr sz="800" b="1">
                           <a:solidFill>
                             <a:srgbClr val="FFFFFF"/>
                           </a:solidFill>
                           <a:latin typeface="微软雅黑"/>
                         </a:rPr>
-                        <a:t>字段</a:t>
+                        <a:t>分离层级</a:t>
                       </a:r>
                     </a:p>
                   </a:txBody>
-                  <a:tcPr marL="36000" marR="21600" marT="14400" marB="14400">
+                  <a:tcPr marL="43200" marR="21600" marT="36000" marB="36000">
                     <a:solidFill>
                       <a:srgbClr val="C7000F"/>
                     </a:solidFill>
@@ -4548,17 +4080,17 @@
                     <a:lstStyle/>
                     <a:p>
                       <a:r>
-                        <a:rPr sz="750" b="1">
+                        <a:rPr sz="800" b="1">
                           <a:solidFill>
                             <a:srgbClr val="FFFFFF"/>
                           </a:solidFill>
                           <a:latin typeface="微软雅黑"/>
                         </a:rPr>
-                        <a:t>必填</a:t>
+                        <a:t>对应字段</a:t>
                       </a:r>
                     </a:p>
                   </a:txBody>
-                  <a:tcPr marL="36000" marR="21600" marT="14400" marB="14400">
+                  <a:tcPr marL="43200" marR="21600" marT="36000" marB="36000">
                     <a:solidFill>
                       <a:srgbClr val="C7000F"/>
                     </a:solidFill>
@@ -4570,7 +4102,7 @@
                     <a:lstStyle/>
                     <a:p>
                       <a:r>
-                        <a:rPr sz="750" b="1">
+                        <a:rPr sz="800" b="1">
                           <a:solidFill>
                             <a:srgbClr val="FFFFFF"/>
                           </a:solidFill>
@@ -4580,31 +4112,31 @@
                       </a:r>
                     </a:p>
                   </a:txBody>
-                  <a:tcPr marL="36000" marR="21600" marT="14400" marB="14400">
+                  <a:tcPr marL="43200" marR="21600" marT="36000" marB="36000">
                     <a:solidFill>
                       <a:srgbClr val="C7000F"/>
                     </a:solidFill>
                   </a:tcPr>
                 </a:tc>
               </a:tr>
-              <a:tr h="200250">
+              <a:tr h="180000">
                 <a:tc>
                   <a:txBody>
                     <a:bodyPr wrap="square"/>
                     <a:lstStyle/>
                     <a:p>
                       <a:r>
-                        <a:rPr sz="750" b="0">
+                        <a:rPr sz="800" b="0">
                           <a:solidFill>
                             <a:srgbClr val="1F1F1F"/>
                           </a:solidFill>
                           <a:latin typeface="微软雅黑"/>
                         </a:rPr>
-                        <a:t>id</a:t>
+                        <a:t>Model (数据获取)</a:t>
                       </a:r>
                     </a:p>
                   </a:txBody>
-                  <a:tcPr marL="36000" marR="21600" marT="14400" marB="14400">
+                  <a:tcPr marL="43200" marR="21600" marT="36000" marB="36000">
                     <a:solidFill>
                       <a:srgbClr val="FFFFFF"/>
                     </a:solidFill>
@@ -4616,17 +4148,17 @@
                     <a:lstStyle/>
                     <a:p>
                       <a:r>
-                        <a:rPr sz="750" b="0">
+                        <a:rPr sz="800" b="0">
                           <a:solidFill>
                             <a:srgbClr val="1F1F1F"/>
                           </a:solidFill>
                           <a:latin typeface="微软雅黑"/>
                         </a:rPr>
-                        <a:t>✓</a:t>
+                        <a:t>datasets[]</a:t>
                       </a:r>
                     </a:p>
                   </a:txBody>
-                  <a:tcPr marL="36000" marR="21600" marT="14400" marB="14400">
+                  <a:tcPr marL="43200" marR="21600" marT="36000" marB="36000">
                     <a:solidFill>
                       <a:srgbClr val="FFFFFF"/>
                     </a:solidFill>
@@ -4638,41 +4170,41 @@
                     <a:lstStyle/>
                     <a:p>
                       <a:r>
-                        <a:rPr sz="750" b="0">
+                        <a:rPr sz="800" b="0">
                           <a:solidFill>
                             <a:srgbClr val="1F1F1F"/>
                           </a:solidFill>
                           <a:latin typeface="微软雅黑"/>
                         </a:rPr>
-                        <a:t>参数唯一标识，内容中以 {id} 引用</a:t>
+                        <a:t>基于 id + depends_on 构建局部 DAG，控制并发与依赖</a:t>
                       </a:r>
                     </a:p>
                   </a:txBody>
-                  <a:tcPr marL="36000" marR="21600" marT="14400" marB="14400">
+                  <a:tcPr marL="43200" marR="21600" marT="36000" marB="36000">
                     <a:solidFill>
                       <a:srgbClr val="FFFFFF"/>
                     </a:solidFill>
                   </a:tcPr>
                 </a:tc>
               </a:tr>
-              <a:tr h="200250">
+              <a:tr h="180000">
                 <a:tc>
                   <a:txBody>
                     <a:bodyPr wrap="square"/>
                     <a:lstStyle/>
                     <a:p>
                       <a:r>
-                        <a:rPr sz="750" b="0">
+                        <a:rPr sz="800" b="0">
                           <a:solidFill>
                             <a:srgbClr val="1F1F1F"/>
                           </a:solidFill>
                           <a:latin typeface="微软雅黑"/>
                         </a:rPr>
-                        <a:t>label</a:t>
+                        <a:t>View (视图布局)</a:t>
                       </a:r>
                     </a:p>
                   </a:txBody>
-                  <a:tcPr marL="36000" marR="21600" marT="14400" marB="14400">
+                  <a:tcPr marL="43200" marR="21600" marT="36000" marB="36000">
                     <a:solidFill>
                       <a:srgbClr val="F5F5F5"/>
                     </a:solidFill>
@@ -4684,17 +4216,17 @@
                     <a:lstStyle/>
                     <a:p>
                       <a:r>
-                        <a:rPr sz="750" b="0">
+                        <a:rPr sz="800" b="0">
                           <a:solidFill>
                             <a:srgbClr val="1F1F1F"/>
                           </a:solidFill>
                           <a:latin typeface="微软雅黑"/>
                         </a:rPr>
-                        <a:t>✓</a:t>
+                        <a:t>presentation</a:t>
                       </a:r>
                     </a:p>
                   </a:txBody>
-                  <a:tcPr marL="36000" marR="21600" marT="14400" marB="14400">
+                  <a:tcPr marL="43200" marR="21600" marT="36000" marB="36000">
                     <a:solidFill>
                       <a:srgbClr val="F5F5F5"/>
                     </a:solidFill>
@@ -4706,359 +4238,19 @@
                     <a:lstStyle/>
                     <a:p>
                       <a:r>
-                        <a:rPr sz="750" b="0">
+                        <a:rPr sz="800" b="0">
                           <a:solidFill>
                             <a:srgbClr val="1F1F1F"/>
                           </a:solidFill>
                           <a:latin typeface="微软雅黑"/>
                         </a:rPr>
-                        <a:t>用户可读名称（用于对话提示）</a:t>
+                        <a:t>仅描述 UI，通过 dataset_id 绑定数据 (单图单段或表格)</a:t>
                       </a:r>
                     </a:p>
                   </a:txBody>
-                  <a:tcPr marL="36000" marR="21600" marT="14400" marB="14400">
+                  <a:tcPr marL="43200" marR="21600" marT="36000" marB="36000">
                     <a:solidFill>
                       <a:srgbClr val="F5F5F5"/>
-                    </a:solidFill>
-                  </a:tcPr>
-                </a:tc>
-              </a:tr>
-              <a:tr h="200250">
-                <a:tc>
-                  <a:txBody>
-                    <a:bodyPr wrap="square"/>
-                    <a:lstStyle/>
-                    <a:p>
-                      <a:r>
-                        <a:rPr sz="750" b="0">
-                          <a:solidFill>
-                            <a:srgbClr val="1F1F1F"/>
-                          </a:solidFill>
-                          <a:latin typeface="微软雅黑"/>
-                        </a:rPr>
-                        <a:t>required</a:t>
-                      </a:r>
-                    </a:p>
-                  </a:txBody>
-                  <a:tcPr marL="36000" marR="21600" marT="14400" marB="14400">
-                    <a:solidFill>
-                      <a:srgbClr val="FFFFFF"/>
-                    </a:solidFill>
-                  </a:tcPr>
-                </a:tc>
-                <a:tc>
-                  <a:txBody>
-                    <a:bodyPr wrap="square"/>
-                    <a:lstStyle/>
-                    <a:p>
-                      <a:r>
-                        <a:rPr sz="750" b="0">
-                          <a:solidFill>
-                            <a:srgbClr val="1F1F1F"/>
-                          </a:solidFill>
-                          <a:latin typeface="微软雅黑"/>
-                        </a:rPr>
-                        <a:t>✓</a:t>
-                      </a:r>
-                    </a:p>
-                  </a:txBody>
-                  <a:tcPr marL="36000" marR="21600" marT="14400" marB="14400">
-                    <a:solidFill>
-                      <a:srgbClr val="FFFFFF"/>
-                    </a:solidFill>
-                  </a:tcPr>
-                </a:tc>
-                <a:tc>
-                  <a:txBody>
-                    <a:bodyPr wrap="square"/>
-                    <a:lstStyle/>
-                    <a:p>
-                      <a:r>
-                        <a:rPr sz="750" b="0">
-                          <a:solidFill>
-                            <a:srgbClr val="1F1F1F"/>
-                          </a:solidFill>
-                          <a:latin typeface="微软雅黑"/>
-                        </a:rPr>
-                        <a:t>布尔值，是否必填</a:t>
-                      </a:r>
-                    </a:p>
-                  </a:txBody>
-                  <a:tcPr marL="36000" marR="21600" marT="14400" marB="14400">
-                    <a:solidFill>
-                      <a:srgbClr val="FFFFFF"/>
-                    </a:solidFill>
-                  </a:tcPr>
-                </a:tc>
-              </a:tr>
-              <a:tr h="200250">
-                <a:tc>
-                  <a:txBody>
-                    <a:bodyPr wrap="square"/>
-                    <a:lstStyle/>
-                    <a:p>
-                      <a:r>
-                        <a:rPr sz="750" b="0">
-                          <a:solidFill>
-                            <a:srgbClr val="1F1F1F"/>
-                          </a:solidFill>
-                          <a:latin typeface="微软雅黑"/>
-                        </a:rPr>
-                        <a:t>input_type</a:t>
-                      </a:r>
-                    </a:p>
-                  </a:txBody>
-                  <a:tcPr marL="36000" marR="21600" marT="14400" marB="14400">
-                    <a:solidFill>
-                      <a:srgbClr val="F5F5F5"/>
-                    </a:solidFill>
-                  </a:tcPr>
-                </a:tc>
-                <a:tc>
-                  <a:txBody>
-                    <a:bodyPr wrap="square"/>
-                    <a:lstStyle/>
-                    <a:p>
-                      <a:r>
-                        <a:rPr sz="750" b="0">
-                          <a:solidFill>
-                            <a:srgbClr val="1F1F1F"/>
-                          </a:solidFill>
-                          <a:latin typeface="微软雅黑"/>
-                        </a:rPr>
-                        <a:t>✓</a:t>
-                      </a:r>
-                    </a:p>
-                  </a:txBody>
-                  <a:tcPr marL="36000" marR="21600" marT="14400" marB="14400">
-                    <a:solidFill>
-                      <a:srgbClr val="F5F5F5"/>
-                    </a:solidFill>
-                  </a:tcPr>
-                </a:tc>
-                <a:tc>
-                  <a:txBody>
-                    <a:bodyPr wrap="square"/>
-                    <a:lstStyle/>
-                    <a:p>
-                      <a:r>
-                        <a:rPr sz="750" b="0">
-                          <a:solidFill>
-                            <a:srgbClr val="1F1F1F"/>
-                          </a:solidFill>
-                          <a:latin typeface="微软雅黑"/>
-                        </a:rPr>
-                        <a:t>free_text（自由输入）/ enum（枚举）/ dynamic（动态选项）</a:t>
-                      </a:r>
-                    </a:p>
-                  </a:txBody>
-                  <a:tcPr marL="36000" marR="21600" marT="14400" marB="14400">
-                    <a:solidFill>
-                      <a:srgbClr val="F5F5F5"/>
-                    </a:solidFill>
-                  </a:tcPr>
-                </a:tc>
-              </a:tr>
-              <a:tr h="200250">
-                <a:tc>
-                  <a:txBody>
-                    <a:bodyPr wrap="square"/>
-                    <a:lstStyle/>
-                    <a:p>
-                      <a:r>
-                        <a:rPr sz="750" b="0">
-                          <a:solidFill>
-                            <a:srgbClr val="1F1F1F"/>
-                          </a:solidFill>
-                          <a:latin typeface="微软雅黑"/>
-                        </a:rPr>
-                        <a:t>multi</a:t>
-                      </a:r>
-                    </a:p>
-                  </a:txBody>
-                  <a:tcPr marL="36000" marR="21600" marT="14400" marB="14400">
-                    <a:solidFill>
-                      <a:srgbClr val="FFFFFF"/>
-                    </a:solidFill>
-                  </a:tcPr>
-                </a:tc>
-                <a:tc>
-                  <a:txBody>
-                    <a:bodyPr wrap="square"/>
-                    <a:lstStyle/>
-                    <a:p>
-                      <a:r>
-                        <a:rPr sz="750" b="0">
-                          <a:solidFill>
-                            <a:srgbClr val="1F1F1F"/>
-                          </a:solidFill>
-                          <a:latin typeface="微软雅黑"/>
-                        </a:rPr>
-                        <a:t>—</a:t>
-                      </a:r>
-                    </a:p>
-                  </a:txBody>
-                  <a:tcPr marL="36000" marR="21600" marT="14400" marB="14400">
-                    <a:solidFill>
-                      <a:srgbClr val="FFFFFF"/>
-                    </a:solidFill>
-                  </a:tcPr>
-                </a:tc>
-                <a:tc>
-                  <a:txBody>
-                    <a:bodyPr wrap="square"/>
-                    <a:lstStyle/>
-                    <a:p>
-                      <a:r>
-                        <a:rPr sz="750" b="0">
-                          <a:solidFill>
-                            <a:srgbClr val="1F1F1F"/>
-                          </a:solidFill>
-                          <a:latin typeface="微软雅黑"/>
-                        </a:rPr>
-                        <a:t>true 时允许多值，可作为 foreach 的绑定来源</a:t>
-                      </a:r>
-                    </a:p>
-                  </a:txBody>
-                  <a:tcPr marL="36000" marR="21600" marT="14400" marB="14400">
-                    <a:solidFill>
-                      <a:srgbClr val="FFFFFF"/>
-                    </a:solidFill>
-                  </a:tcPr>
-                </a:tc>
-              </a:tr>
-              <a:tr h="200250">
-                <a:tc>
-                  <a:txBody>
-                    <a:bodyPr wrap="square"/>
-                    <a:lstStyle/>
-                    <a:p>
-                      <a:r>
-                        <a:rPr sz="750" b="0">
-                          <a:solidFill>
-                            <a:srgbClr val="1F1F1F"/>
-                          </a:solidFill>
-                          <a:latin typeface="微软雅黑"/>
-                        </a:rPr>
-                        <a:t>options</a:t>
-                      </a:r>
-                    </a:p>
-                  </a:txBody>
-                  <a:tcPr marL="36000" marR="21600" marT="14400" marB="14400">
-                    <a:solidFill>
-                      <a:srgbClr val="F5F5F5"/>
-                    </a:solidFill>
-                  </a:tcPr>
-                </a:tc>
-                <a:tc>
-                  <a:txBody>
-                    <a:bodyPr wrap="square"/>
-                    <a:lstStyle/>
-                    <a:p>
-                      <a:r>
-                        <a:rPr sz="750" b="0">
-                          <a:solidFill>
-                            <a:srgbClr val="1F1F1F"/>
-                          </a:solidFill>
-                          <a:latin typeface="微软雅黑"/>
-                        </a:rPr>
-                        <a:t>条件</a:t>
-                      </a:r>
-                    </a:p>
-                  </a:txBody>
-                  <a:tcPr marL="36000" marR="21600" marT="14400" marB="14400">
-                    <a:solidFill>
-                      <a:srgbClr val="F5F5F5"/>
-                    </a:solidFill>
-                  </a:tcPr>
-                </a:tc>
-                <a:tc>
-                  <a:txBody>
-                    <a:bodyPr wrap="square"/>
-                    <a:lstStyle/>
-                    <a:p>
-                      <a:r>
-                        <a:rPr sz="750" b="0">
-                          <a:solidFill>
-                            <a:srgbClr val="1F1F1F"/>
-                          </a:solidFill>
-                          <a:latin typeface="微软雅黑"/>
-                        </a:rPr>
-                        <a:t>input_type=enum 时的枚举选项列表</a:t>
-                      </a:r>
-                    </a:p>
-                  </a:txBody>
-                  <a:tcPr marL="36000" marR="21600" marT="14400" marB="14400">
-                    <a:solidFill>
-                      <a:srgbClr val="F5F5F5"/>
-                    </a:solidFill>
-                  </a:tcPr>
-                </a:tc>
-              </a:tr>
-              <a:tr h="200250">
-                <a:tc>
-                  <a:txBody>
-                    <a:bodyPr wrap="square"/>
-                    <a:lstStyle/>
-                    <a:p>
-                      <a:r>
-                        <a:rPr sz="750" b="0">
-                          <a:solidFill>
-                            <a:srgbClr val="1F1F1F"/>
-                          </a:solidFill>
-                          <a:latin typeface="微软雅黑"/>
-                        </a:rPr>
-                        <a:t>source</a:t>
-                      </a:r>
-                    </a:p>
-                  </a:txBody>
-                  <a:tcPr marL="36000" marR="21600" marT="14400" marB="14400">
-                    <a:solidFill>
-                      <a:srgbClr val="FFFFFF"/>
-                    </a:solidFill>
-                  </a:tcPr>
-                </a:tc>
-                <a:tc>
-                  <a:txBody>
-                    <a:bodyPr wrap="square"/>
-                    <a:lstStyle/>
-                    <a:p>
-                      <a:r>
-                        <a:rPr sz="750" b="0">
-                          <a:solidFill>
-                            <a:srgbClr val="1F1F1F"/>
-                          </a:solidFill>
-                          <a:latin typeface="微软雅黑"/>
-                        </a:rPr>
-                        <a:t>条件</a:t>
-                      </a:r>
-                    </a:p>
-                  </a:txBody>
-                  <a:tcPr marL="36000" marR="21600" marT="14400" marB="14400">
-                    <a:solidFill>
-                      <a:srgbClr val="FFFFFF"/>
-                    </a:solidFill>
-                  </a:tcPr>
-                </a:tc>
-                <a:tc>
-                  <a:txBody>
-                    <a:bodyPr wrap="square"/>
-                    <a:lstStyle/>
-                    <a:p>
-                      <a:r>
-                        <a:rPr sz="750" b="0">
-                          <a:solidFill>
-                            <a:srgbClr val="1F1F1F"/>
-                          </a:solidFill>
-                          <a:latin typeface="微软雅黑"/>
-                        </a:rPr>
-                        <a:t>input_type=dynamic 时的动态来源（接口 URL 或 SQL）</a:t>
-                      </a:r>
-                    </a:p>
-                  </a:txBody>
-                  <a:tcPr marL="36000" marR="21600" marT="14400" marB="14400">
-                    <a:solidFill>
-                      <a:srgbClr val="FFFFFF"/>
                     </a:solidFill>
                   </a:tcPr>
                 </a:tc>
@@ -5069,13 +4261,13 @@
       </p:graphicFrame>
       <p:sp>
         <p:nvSpPr>
-          <p:cNvPr id="18" name="Rectangle 17"/>
+          <p:cNvPr id="19" name="Rectangle 18"/>
           <p:cNvSpPr/>
           <p:nvPr/>
         </p:nvSpPr>
         <p:spPr>
           <a:xfrm>
-            <a:off x="6120000" y="2847600"/>
+            <a:off x="5220000" y="3128400"/>
             <a:ext cx="64800" cy="158400"/>
           </a:xfrm>
           <a:prstGeom prst="rect">
@@ -5112,14 +4304,14 @@
       </p:sp>
       <p:sp>
         <p:nvSpPr>
-          <p:cNvPr id="19" name="TextBox 18"/>
+          <p:cNvPr id="20" name="TextBox 19"/>
           <p:cNvSpPr txBox="1"/>
           <p:nvPr/>
         </p:nvSpPr>
         <p:spPr>
           <a:xfrm>
-            <a:off x="6220800" y="2815200"/>
-            <a:ext cx="5868000" cy="208800"/>
+            <a:off x="5320800" y="3085200"/>
+            <a:ext cx="6768000" cy="208800"/>
           </a:xfrm>
           <a:prstGeom prst="rect">
             <a:avLst/>
@@ -5127,35 +4319,39 @@
           <a:noFill/>
         </p:spPr>
         <p:txBody>
-          <a:bodyPr wrap="none">
+          <a:bodyPr wrap="square">
             <a:spAutoFit/>
           </a:bodyPr>
           <a:lstStyle/>
           <a:p>
-            <a:pPr algn="l"/>
-            <a:r>
-              <a:rPr sz="850" b="1">
+            <a:pPr algn="l">
+              <a:spcAft>
+                <a:spcPts val="200"/>
+              </a:spcAft>
+            </a:pPr>
+            <a:r>
+              <a:rPr sz="900" b="1">
                 <a:solidFill>
                   <a:srgbClr val="C7000F"/>
                 </a:solidFill>
                 <a:latin typeface="微软雅黑"/>
               </a:rPr>
-              <a:t>数据来源（source.kind）</a:t>
+              <a:t>3. 基础呈现形式 (presentation.type)</a:t>
             </a:r>
           </a:p>
         </p:txBody>
       </p:sp>
       <p:graphicFrame>
         <p:nvGraphicFramePr>
-          <p:cNvPr id="20" name="Table 19"/>
+          <p:cNvPr id="21" name="Table 20"/>
           <p:cNvGraphicFramePr>
             <a:graphicFrameLocks noGrp="1"/>
           </p:cNvGraphicFramePr>
           <p:nvPr/>
         </p:nvGraphicFramePr>
         <p:xfrm>
-          <a:off x="6120000" y="3031200"/>
-          <a:ext cx="5868000" cy="810000"/>
+          <a:off x="5220000" y="3311999"/>
+          <a:ext cx="6768000" cy="936000"/>
         </p:xfrm>
         <a:graphic>
           <a:graphicData uri="http://schemas.openxmlformats.org/drawingml/2006/table">
@@ -5164,28 +4360,28 @@
                 <a:tableStyleId>{5C22544A-7EE6-4342-B048-85BDC9FD1C3A}</a:tableStyleId>
               </a:tblPr>
               <a:tblGrid>
-                <a:gridCol w="938880"/>
-                <a:gridCol w="1408320"/>
-                <a:gridCol w="3520800"/>
+                <a:gridCol w="1285920"/>
+                <a:gridCol w="1218240"/>
+                <a:gridCol w="4263840"/>
               </a:tblGrid>
-              <a:tr h="202500">
+              <a:tr h="156000">
                 <a:tc>
                   <a:txBody>
                     <a:bodyPr wrap="square"/>
                     <a:lstStyle/>
                     <a:p>
                       <a:r>
-                        <a:rPr sz="750" b="1">
+                        <a:rPr sz="800" b="1">
                           <a:solidFill>
                             <a:srgbClr val="FFFFFF"/>
                           </a:solidFill>
                           <a:latin typeface="微软雅黑"/>
                         </a:rPr>
-                        <a:t>kind</a:t>
+                        <a:t>type</a:t>
                       </a:r>
                     </a:p>
                   </a:txBody>
-                  <a:tcPr marL="36000" marR="21600" marT="14400" marB="14400">
+                  <a:tcPr marL="43200" marR="21600" marT="36000" marB="36000">
                     <a:solidFill>
                       <a:srgbClr val="C7000F"/>
                     </a:solidFill>
@@ -5197,17 +4393,17 @@
                     <a:lstStyle/>
                     <a:p>
                       <a:r>
-                        <a:rPr sz="750" b="1">
+                        <a:rPr sz="800" b="1">
                           <a:solidFill>
                             <a:srgbClr val="FFFFFF"/>
                           </a:solidFill>
                           <a:latin typeface="微软雅黑"/>
                         </a:rPr>
-                        <a:t>关键字段</a:t>
+                        <a:t>可用 source.kind</a:t>
                       </a:r>
                     </a:p>
                   </a:txBody>
-                  <a:tcPr marL="36000" marR="21600" marT="14400" marB="14400">
+                  <a:tcPr marL="43200" marR="21600" marT="36000" marB="36000">
                     <a:solidFill>
                       <a:srgbClr val="C7000F"/>
                     </a:solidFill>
@@ -5219,7 +4415,7 @@
                     <a:lstStyle/>
                     <a:p>
                       <a:r>
-                        <a:rPr sz="750" b="1">
+                        <a:rPr sz="800" b="1">
                           <a:solidFill>
                             <a:srgbClr val="FFFFFF"/>
                           </a:solidFill>
@@ -5229,31 +4425,31 @@
                       </a:r>
                     </a:p>
                   </a:txBody>
-                  <a:tcPr marL="36000" marR="21600" marT="14400" marB="14400">
+                  <a:tcPr marL="43200" marR="21600" marT="36000" marB="36000">
                     <a:solidFill>
                       <a:srgbClr val="C7000F"/>
                     </a:solidFill>
                   </a:tcPr>
                 </a:tc>
               </a:tr>
-              <a:tr h="202500">
+              <a:tr h="156000">
                 <a:tc>
                   <a:txBody>
                     <a:bodyPr wrap="square"/>
                     <a:lstStyle/>
                     <a:p>
                       <a:r>
-                        <a:rPr sz="750" b="0">
+                        <a:rPr sz="800" b="0">
                           <a:solidFill>
                             <a:srgbClr val="1F1F1F"/>
                           </a:solidFill>
                           <a:latin typeface="微软雅黑"/>
                         </a:rPr>
-                        <a:t>sql</a:t>
+                        <a:t>text</a:t>
                       </a:r>
                     </a:p>
                   </a:txBody>
-                  <a:tcPr marL="36000" marR="21600" marT="14400" marB="14400">
+                  <a:tcPr marL="43200" marR="21600" marT="36000" marB="36000">
                     <a:solidFill>
                       <a:srgbClr val="FFFFFF"/>
                     </a:solidFill>
@@ -5265,17 +4461,17 @@
                     <a:lstStyle/>
                     <a:p>
                       <a:r>
-                        <a:rPr sz="750" b="0">
+                        <a:rPr sz="800" b="0">
                           <a:solidFill>
                             <a:srgbClr val="1F1F1F"/>
                           </a:solidFill>
                           <a:latin typeface="微软雅黑"/>
                         </a:rPr>
-                        <a:t>query</a:t>
+                        <a:t>（无）/ ai_syn</a:t>
                       </a:r>
                     </a:p>
                   </a:txBody>
-                  <a:tcPr marL="36000" marR="21600" marT="14400" marB="14400">
+                  <a:tcPr marL="43200" marR="21600" marT="36000" marB="36000">
                     <a:solidFill>
                       <a:srgbClr val="FFFFFF"/>
                     </a:solidFill>
@@ -5287,41 +4483,41 @@
                     <a:lstStyle/>
                     <a:p>
                       <a:r>
-                        <a:rPr sz="750" b="0">
+                        <a:rPr sz="800" b="0">
                           <a:solidFill>
                             <a:srgbClr val="1F1F1F"/>
                           </a:solidFill>
                           <a:latin typeface="微软雅黑"/>
                         </a:rPr>
-                        <a:t>直接执行参数化 SQL，支持 {param} / {$var} 占位符</a:t>
+                        <a:t>静态段落 ({param}直填)，或挂载 AI 报告结论摘要</a:t>
                       </a:r>
                     </a:p>
                   </a:txBody>
-                  <a:tcPr marL="36000" marR="21600" marT="14400" marB="14400">
+                  <a:tcPr marL="43200" marR="21600" marT="36000" marB="36000">
                     <a:solidFill>
                       <a:srgbClr val="FFFFFF"/>
                     </a:solidFill>
                   </a:tcPr>
                 </a:tc>
               </a:tr>
-              <a:tr h="202500">
+              <a:tr h="156000">
                 <a:tc>
                   <a:txBody>
                     <a:bodyPr wrap="square"/>
                     <a:lstStyle/>
                     <a:p>
                       <a:r>
-                        <a:rPr sz="750" b="0">
+                        <a:rPr sz="800" b="0">
                           <a:solidFill>
                             <a:srgbClr val="1F1F1F"/>
                           </a:solidFill>
                           <a:latin typeface="微软雅黑"/>
                         </a:rPr>
-                        <a:t>nl2sql</a:t>
+                        <a:t>value</a:t>
                       </a:r>
                     </a:p>
                   </a:txBody>
-                  <a:tcPr marL="36000" marR="21600" marT="14400" marB="14400">
+                  <a:tcPr marL="43200" marR="21600" marT="36000" marB="36000">
                     <a:solidFill>
                       <a:srgbClr val="F5F5F5"/>
                     </a:solidFill>
@@ -5333,17 +4529,17 @@
                     <a:lstStyle/>
                     <a:p>
                       <a:r>
-                        <a:rPr sz="750" b="0">
+                        <a:rPr sz="800" b="0">
                           <a:solidFill>
                             <a:srgbClr val="1F1F1F"/>
                           </a:solidFill>
                           <a:latin typeface="微软雅黑"/>
                         </a:rPr>
-                        <a:t>description</a:t>
+                        <a:t>sql</a:t>
                       </a:r>
                     </a:p>
                   </a:txBody>
-                  <a:tcPr marL="36000" marR="21600" marT="14400" marB="14400">
+                  <a:tcPr marL="43200" marR="21600" marT="36000" marB="36000">
                     <a:solidFill>
                       <a:srgbClr val="F5F5F5"/>
                     </a:solidFill>
@@ -5355,41 +4551,41 @@
                     <a:lstStyle/>
                     <a:p>
                       <a:r>
-                        <a:rPr sz="750" b="0">
+                        <a:rPr sz="800" b="0">
                           <a:solidFill>
                             <a:srgbClr val="1F1F1F"/>
                           </a:solidFill>
                           <a:latin typeface="微软雅黑"/>
                         </a:rPr>
-                        <a:t>自然语言描述 → LLM 生成 SQL → 执行</a:t>
+                        <a:t>执行单值 SQL，嵌于 anchor 单值锚点语句中</a:t>
                       </a:r>
                     </a:p>
                   </a:txBody>
-                  <a:tcPr marL="36000" marR="21600" marT="14400" marB="14400">
+                  <a:tcPr marL="43200" marR="21600" marT="36000" marB="36000">
                     <a:solidFill>
                       <a:srgbClr val="F5F5F5"/>
                     </a:solidFill>
                   </a:tcPr>
                 </a:tc>
               </a:tr>
-              <a:tr h="202500">
+              <a:tr h="156000">
                 <a:tc>
                   <a:txBody>
                     <a:bodyPr wrap="square"/>
                     <a:lstStyle/>
                     <a:p>
                       <a:r>
-                        <a:rPr sz="750" b="0">
+                        <a:rPr sz="800" b="0">
                           <a:solidFill>
                             <a:srgbClr val="1F1F1F"/>
                           </a:solidFill>
                           <a:latin typeface="微软雅黑"/>
                         </a:rPr>
-                        <a:t>ai_synthesis</a:t>
+                        <a:t>chart</a:t>
                       </a:r>
                     </a:p>
                   </a:txBody>
-                  <a:tcPr marL="36000" marR="21600" marT="14400" marB="14400">
+                  <a:tcPr marL="43200" marR="21600" marT="36000" marB="36000">
                     <a:solidFill>
                       <a:srgbClr val="FFFFFF"/>
                     </a:solidFill>
@@ -5401,17 +4597,17 @@
                     <a:lstStyle/>
                     <a:p>
                       <a:r>
-                        <a:rPr sz="750" b="0">
+                        <a:rPr sz="800" b="0">
                           <a:solidFill>
                             <a:srgbClr val="1F1F1F"/>
                           </a:solidFill>
                           <a:latin typeface="微软雅黑"/>
                         </a:rPr>
-                        <a:t>context / knowledge / prompt</a:t>
+                        <a:t>sql / nl2sql</a:t>
                       </a:r>
                     </a:p>
                   </a:txBody>
-                  <a:tcPr marL="36000" marR="21600" marT="14400" marB="14400">
+                  <a:tcPr marL="43200" marR="21600" marT="36000" marB="36000">
                     <a:solidFill>
                       <a:srgbClr val="FFFFFF"/>
                     </a:solidFill>
@@ -5423,17 +4619,153 @@
                     <a:lstStyle/>
                     <a:p>
                       <a:r>
-                        <a:rPr sz="750" b="0">
+                        <a:rPr sz="800" b="0">
                           <a:solidFill>
                             <a:srgbClr val="1F1F1F"/>
                           </a:solidFill>
                           <a:latin typeface="微软雅黑"/>
                         </a:rPr>
-                        <a:t>多源上下文（refs+queries）+ RAG 知识检索 + LLM 合成</a:t>
+                        <a:t>渲染折线、柱状、饼图等，自然语言可由LLM推断 chart_type</a:t>
                       </a:r>
                     </a:p>
                   </a:txBody>
-                  <a:tcPr marL="36000" marR="21600" marT="14400" marB="14400">
+                  <a:tcPr marL="43200" marR="21600" marT="36000" marB="36000">
+                    <a:solidFill>
+                      <a:srgbClr val="FFFFFF"/>
+                    </a:solidFill>
+                  </a:tcPr>
+                </a:tc>
+              </a:tr>
+              <a:tr h="156000">
+                <a:tc>
+                  <a:txBody>
+                    <a:bodyPr wrap="square"/>
+                    <a:lstStyle/>
+                    <a:p>
+                      <a:r>
+                        <a:rPr sz="800" b="0">
+                          <a:solidFill>
+                            <a:srgbClr val="1F1F1F"/>
+                          </a:solidFill>
+                          <a:latin typeface="微软雅黑"/>
+                        </a:rPr>
+                        <a:t>simple_table</a:t>
+                      </a:r>
+                    </a:p>
+                  </a:txBody>
+                  <a:tcPr marL="43200" marR="21600" marT="36000" marB="36000">
+                    <a:solidFill>
+                      <a:srgbClr val="F5F5F5"/>
+                    </a:solidFill>
+                  </a:tcPr>
+                </a:tc>
+                <a:tc>
+                  <a:txBody>
+                    <a:bodyPr wrap="square"/>
+                    <a:lstStyle/>
+                    <a:p>
+                      <a:r>
+                        <a:rPr sz="800" b="0">
+                          <a:solidFill>
+                            <a:srgbClr val="1F1F1F"/>
+                          </a:solidFill>
+                          <a:latin typeface="微软雅黑"/>
+                        </a:rPr>
+                        <a:t>sql / nl2sql</a:t>
+                      </a:r>
+                    </a:p>
+                  </a:txBody>
+                  <a:tcPr marL="43200" marR="21600" marT="36000" marB="36000">
+                    <a:solidFill>
+                      <a:srgbClr val="F5F5F5"/>
+                    </a:solidFill>
+                  </a:tcPr>
+                </a:tc>
+                <a:tc>
+                  <a:txBody>
+                    <a:bodyPr wrap="square"/>
+                    <a:lstStyle/>
+                    <a:p>
+                      <a:r>
+                        <a:rPr sz="800" b="0">
+                          <a:solidFill>
+                            <a:srgbClr val="1F1F1F"/>
+                          </a:solidFill>
+                          <a:latin typeface="微软雅黑"/>
+                        </a:rPr>
+                        <a:t>简单明细列表，自动利用查询返回结果推断列名</a:t>
+                      </a:r>
+                    </a:p>
+                  </a:txBody>
+                  <a:tcPr marL="43200" marR="21600" marT="36000" marB="36000">
+                    <a:solidFill>
+                      <a:srgbClr val="F5F5F5"/>
+                    </a:solidFill>
+                  </a:tcPr>
+                </a:tc>
+              </a:tr>
+              <a:tr h="156000">
+                <a:tc>
+                  <a:txBody>
+                    <a:bodyPr wrap="square"/>
+                    <a:lstStyle/>
+                    <a:p>
+                      <a:r>
+                        <a:rPr sz="800" b="0">
+                          <a:solidFill>
+                            <a:srgbClr val="1F1F1F"/>
+                          </a:solidFill>
+                          <a:latin typeface="微软雅黑"/>
+                        </a:rPr>
+                        <a:t>composite_table</a:t>
+                      </a:r>
+                    </a:p>
+                  </a:txBody>
+                  <a:tcPr marL="43200" marR="21600" marT="36000" marB="36000">
+                    <a:solidFill>
+                      <a:srgbClr val="FFFFFF"/>
+                    </a:solidFill>
+                  </a:tcPr>
+                </a:tc>
+                <a:tc>
+                  <a:txBody>
+                    <a:bodyPr wrap="square"/>
+                    <a:lstStyle/>
+                    <a:p>
+                      <a:r>
+                        <a:rPr sz="800" b="0">
+                          <a:solidFill>
+                            <a:srgbClr val="1F1F1F"/>
+                          </a:solidFill>
+                          <a:latin typeface="微软雅黑"/>
+                        </a:rPr>
+                        <a:t>(任何组合)</a:t>
+                      </a:r>
+                    </a:p>
+                  </a:txBody>
+                  <a:tcPr marL="43200" marR="21600" marT="36000" marB="36000">
+                    <a:solidFill>
+                      <a:srgbClr val="FFFFFF"/>
+                    </a:solidFill>
+                  </a:tcPr>
+                </a:tc>
+                <a:tc>
+                  <a:txBody>
+                    <a:bodyPr wrap="square"/>
+                    <a:lstStyle/>
+                    <a:p>
+                      <a:r>
+                        <a:rPr sz="800" b="0">
+                          <a:solidFill>
+                            <a:srgbClr val="1F1F1F"/>
+                          </a:solidFill>
+                          <a:latin typeface="微软雅黑"/>
+                        </a:rPr>
+                        <a:t>混合复杂表格！在下页详细解析（局部的独立小世界）</a:t>
+                      </a:r>
+                    </a:p>
+                  </a:txBody>
+                  <a:tcPr marL="43200" marR="21600" marT="36000" marB="36000">
                     <a:solidFill>
                       <a:srgbClr val="FFFFFF"/>
                     </a:solidFill>
@@ -5446,13 +4778,13 @@
       </p:graphicFrame>
       <p:sp>
         <p:nvSpPr>
-          <p:cNvPr id="21" name="Rectangle 20"/>
+          <p:cNvPr id="22" name="Rectangle 21"/>
           <p:cNvSpPr/>
           <p:nvPr/>
         </p:nvSpPr>
         <p:spPr>
           <a:xfrm>
-            <a:off x="6120000" y="3963600"/>
+            <a:off x="5220000" y="4424400"/>
             <a:ext cx="64800" cy="158400"/>
           </a:xfrm>
           <a:prstGeom prst="rect">
@@ -5489,14 +4821,14 @@
       </p:sp>
       <p:sp>
         <p:nvSpPr>
-          <p:cNvPr id="22" name="TextBox 21"/>
+          <p:cNvPr id="23" name="TextBox 22"/>
           <p:cNvSpPr txBox="1"/>
           <p:nvPr/>
         </p:nvSpPr>
         <p:spPr>
           <a:xfrm>
-            <a:off x="6220800" y="3931200"/>
-            <a:ext cx="5868000" cy="208800"/>
+            <a:off x="5320800" y="4381200"/>
+            <a:ext cx="6768000" cy="208800"/>
           </a:xfrm>
           <a:prstGeom prst="rect">
             <a:avLst/>
@@ -5504,601 +4836,384 @@
           <a:noFill/>
         </p:spPr>
         <p:txBody>
-          <a:bodyPr wrap="none">
+          <a:bodyPr wrap="square">
             <a:spAutoFit/>
           </a:bodyPr>
           <a:lstStyle/>
           <a:p>
-            <a:pPr algn="l"/>
-            <a:r>
-              <a:rPr sz="850" b="1">
+            <a:pPr algn="l">
+              <a:spcAft>
+                <a:spcPts val="200"/>
+              </a:spcAft>
+            </a:pPr>
+            <a:r>
+              <a:rPr sz="900" b="1">
                 <a:solidFill>
                   <a:srgbClr val="C7000F"/>
                 </a:solidFill>
                 <a:latin typeface="微软雅黑"/>
               </a:rPr>
-              <a:t>呈现形式（presentation.type）</a:t>
-            </a:r>
-          </a:p>
-        </p:txBody>
-      </p:sp>
-      <p:graphicFrame>
-        <p:nvGraphicFramePr>
-          <p:cNvPr id="23" name="Table 22"/>
-          <p:cNvGraphicFramePr>
-            <a:graphicFrameLocks noGrp="1"/>
-          </p:cNvGraphicFramePr>
+              <a:t>4. 章节展开机制 (foreach)</a:t>
+            </a:r>
+          </a:p>
+        </p:txBody>
+      </p:sp>
+      <p:sp>
+        <p:nvSpPr>
+          <p:cNvPr id="24" name="TextBox 23"/>
+          <p:cNvSpPr txBox="1"/>
           <p:nvPr/>
-        </p:nvGraphicFramePr>
-        <p:xfrm>
-          <a:off x="6120000" y="4147200"/>
-          <a:ext cx="5868000" cy="1152000"/>
-        </p:xfrm>
-        <a:graphic>
-          <a:graphicData uri="http://schemas.openxmlformats.org/drawingml/2006/table">
-            <a:tbl>
-              <a:tblPr firstRow="1" bandRow="1">
-                <a:tableStyleId>{5C22544A-7EE6-4342-B048-85BDC9FD1C3A}</a:tableStyleId>
-              </a:tblPr>
-              <a:tblGrid>
-                <a:gridCol w="1056240"/>
-                <a:gridCol w="997560"/>
-                <a:gridCol w="1114920"/>
-                <a:gridCol w="2699280"/>
-              </a:tblGrid>
-              <a:tr h="192000">
-                <a:tc>
-                  <a:txBody>
-                    <a:bodyPr wrap="square"/>
-                    <a:lstStyle/>
-                    <a:p>
-                      <a:r>
-                        <a:rPr sz="750" b="1">
-                          <a:solidFill>
-                            <a:srgbClr val="FFFFFF"/>
-                          </a:solidFill>
-                          <a:latin typeface="微软雅黑"/>
-                        </a:rPr>
-                        <a:t>type</a:t>
-                      </a:r>
-                    </a:p>
-                  </a:txBody>
-                  <a:tcPr marL="36000" marR="21600" marT="14400" marB="14400">
-                    <a:solidFill>
-                      <a:srgbClr val="C7000F"/>
-                    </a:solidFill>
-                  </a:tcPr>
-                </a:tc>
-                <a:tc>
-                  <a:txBody>
-                    <a:bodyPr wrap="square"/>
-                    <a:lstStyle/>
-                    <a:p>
-                      <a:r>
-                        <a:rPr sz="750" b="1">
-                          <a:solidFill>
-                            <a:srgbClr val="FFFFFF"/>
-                          </a:solidFill>
-                          <a:latin typeface="微软雅黑"/>
-                        </a:rPr>
-                        <a:t>关键字段</a:t>
-                      </a:r>
-                    </a:p>
-                  </a:txBody>
-                  <a:tcPr marL="36000" marR="21600" marT="14400" marB="14400">
-                    <a:solidFill>
-                      <a:srgbClr val="C7000F"/>
-                    </a:solidFill>
-                  </a:tcPr>
-                </a:tc>
-                <a:tc>
-                  <a:txBody>
-                    <a:bodyPr wrap="square"/>
-                    <a:lstStyle/>
-                    <a:p>
-                      <a:r>
-                        <a:rPr sz="750" b="1">
-                          <a:solidFill>
-                            <a:srgbClr val="FFFFFF"/>
-                          </a:solidFill>
-                          <a:latin typeface="微软雅黑"/>
-                        </a:rPr>
-                        <a:t>支持 source.kind</a:t>
-                      </a:r>
-                    </a:p>
-                  </a:txBody>
-                  <a:tcPr marL="36000" marR="21600" marT="14400" marB="14400">
-                    <a:solidFill>
-                      <a:srgbClr val="C7000F"/>
-                    </a:solidFill>
-                  </a:tcPr>
-                </a:tc>
-                <a:tc>
-                  <a:txBody>
-                    <a:bodyPr wrap="square"/>
-                    <a:lstStyle/>
-                    <a:p>
-                      <a:r>
-                        <a:rPr sz="750" b="1">
-                          <a:solidFill>
-                            <a:srgbClr val="FFFFFF"/>
-                          </a:solidFill>
-                          <a:latin typeface="微软雅黑"/>
-                        </a:rPr>
-                        <a:t>说明</a:t>
-                      </a:r>
-                    </a:p>
-                  </a:txBody>
-                  <a:tcPr marL="36000" marR="21600" marT="14400" marB="14400">
-                    <a:solidFill>
-                      <a:srgbClr val="C7000F"/>
-                    </a:solidFill>
-                  </a:tcPr>
-                </a:tc>
-              </a:tr>
-              <a:tr h="192000">
-                <a:tc>
-                  <a:txBody>
-                    <a:bodyPr wrap="square"/>
-                    <a:lstStyle/>
-                    <a:p>
-                      <a:r>
-                        <a:rPr sz="750" b="0">
-                          <a:solidFill>
-                            <a:srgbClr val="1F1F1F"/>
-                          </a:solidFill>
-                          <a:latin typeface="微软雅黑"/>
-                        </a:rPr>
-                        <a:t>text</a:t>
-                      </a:r>
-                    </a:p>
-                  </a:txBody>
-                  <a:tcPr marL="36000" marR="21600" marT="14400" marB="14400">
-                    <a:solidFill>
-                      <a:srgbClr val="FFFFFF"/>
-                    </a:solidFill>
-                  </a:tcPr>
-                </a:tc>
-                <a:tc>
-                  <a:txBody>
-                    <a:bodyPr wrap="square"/>
-                    <a:lstStyle/>
-                    <a:p>
-                      <a:r>
-                        <a:rPr sz="750" b="0">
-                          <a:solidFill>
-                            <a:srgbClr val="1F1F1F"/>
-                          </a:solidFill>
-                          <a:latin typeface="微软雅黑"/>
-                        </a:rPr>
-                        <a:t>template</a:t>
-                      </a:r>
-                    </a:p>
-                  </a:txBody>
-                  <a:tcPr marL="36000" marR="21600" marT="14400" marB="14400">
-                    <a:solidFill>
-                      <a:srgbClr val="FFFFFF"/>
-                    </a:solidFill>
-                  </a:tcPr>
-                </a:tc>
-                <a:tc>
-                  <a:txBody>
-                    <a:bodyPr wrap="square"/>
-                    <a:lstStyle/>
-                    <a:p>
-                      <a:r>
-                        <a:rPr sz="750" b="0">
-                          <a:solidFill>
-                            <a:srgbClr val="1F1F1F"/>
-                          </a:solidFill>
-                          <a:latin typeface="微软雅黑"/>
-                        </a:rPr>
-                        <a:t>（无）</a:t>
-                      </a:r>
-                    </a:p>
-                  </a:txBody>
-                  <a:tcPr marL="36000" marR="21600" marT="14400" marB="14400">
-                    <a:solidFill>
-                      <a:srgbClr val="FFFFFF"/>
-                    </a:solidFill>
-                  </a:tcPr>
-                </a:tc>
-                <a:tc>
-                  <a:txBody>
-                    <a:bodyPr wrap="square"/>
-                    <a:lstStyle/>
-                    <a:p>
-                      <a:r>
-                        <a:rPr sz="750" b="0">
-                          <a:solidFill>
-                            <a:srgbClr val="1F1F1F"/>
-                          </a:solidFill>
-                          <a:latin typeface="微软雅黑"/>
-                        </a:rPr>
-                        <a:t>静态文本 + 占位符替换</a:t>
-                      </a:r>
-                    </a:p>
-                  </a:txBody>
-                  <a:tcPr marL="36000" marR="21600" marT="14400" marB="14400">
-                    <a:solidFill>
-                      <a:srgbClr val="FFFFFF"/>
-                    </a:solidFill>
-                  </a:tcPr>
-                </a:tc>
-              </a:tr>
-              <a:tr h="192000">
-                <a:tc>
-                  <a:txBody>
-                    <a:bodyPr wrap="square"/>
-                    <a:lstStyle/>
-                    <a:p>
-                      <a:r>
-                        <a:rPr sz="750" b="0">
-                          <a:solidFill>
-                            <a:srgbClr val="1F1F1F"/>
-                          </a:solidFill>
-                          <a:latin typeface="微软雅黑"/>
-                        </a:rPr>
-                        <a:t>value</a:t>
-                      </a:r>
-                    </a:p>
-                  </a:txBody>
-                  <a:tcPr marL="36000" marR="21600" marT="14400" marB="14400">
-                    <a:solidFill>
-                      <a:srgbClr val="F5F5F5"/>
-                    </a:solidFill>
-                  </a:tcPr>
-                </a:tc>
-                <a:tc>
-                  <a:txBody>
-                    <a:bodyPr wrap="square"/>
-                    <a:lstStyle/>
-                    <a:p>
-                      <a:r>
-                        <a:rPr sz="750" b="0">
-                          <a:solidFill>
-                            <a:srgbClr val="1F1F1F"/>
-                          </a:solidFill>
-                          <a:latin typeface="微软雅黑"/>
-                        </a:rPr>
-                        <a:t>anchor</a:t>
-                      </a:r>
-                    </a:p>
-                  </a:txBody>
-                  <a:tcPr marL="36000" marR="21600" marT="14400" marB="14400">
-                    <a:solidFill>
-                      <a:srgbClr val="F5F5F5"/>
-                    </a:solidFill>
-                  </a:tcPr>
-                </a:tc>
-                <a:tc>
-                  <a:txBody>
-                    <a:bodyPr wrap="square"/>
-                    <a:lstStyle/>
-                    <a:p>
-                      <a:r>
-                        <a:rPr sz="750" b="0">
-                          <a:solidFill>
-                            <a:srgbClr val="1F1F1F"/>
-                          </a:solidFill>
-                          <a:latin typeface="微软雅黑"/>
-                        </a:rPr>
-                        <a:t>sql</a:t>
-                      </a:r>
-                    </a:p>
-                  </a:txBody>
-                  <a:tcPr marL="36000" marR="21600" marT="14400" marB="14400">
-                    <a:solidFill>
-                      <a:srgbClr val="F5F5F5"/>
-                    </a:solidFill>
-                  </a:tcPr>
-                </a:tc>
-                <a:tc>
-                  <a:txBody>
-                    <a:bodyPr wrap="square"/>
-                    <a:lstStyle/>
-                    <a:p>
-                      <a:r>
-                        <a:rPr sz="750" b="0">
-                          <a:solidFill>
-                            <a:srgbClr val="1F1F1F"/>
-                          </a:solidFill>
-                          <a:latin typeface="微软雅黑"/>
-                        </a:rPr>
-                        <a:t>SQL 单值嵌入锚点文本 {$value}</a:t>
-                      </a:r>
-                    </a:p>
-                  </a:txBody>
-                  <a:tcPr marL="36000" marR="21600" marT="14400" marB="14400">
-                    <a:solidFill>
-                      <a:srgbClr val="F5F5F5"/>
-                    </a:solidFill>
-                  </a:tcPr>
-                </a:tc>
-              </a:tr>
-              <a:tr h="192000">
-                <a:tc>
-                  <a:txBody>
-                    <a:bodyPr wrap="square"/>
-                    <a:lstStyle/>
-                    <a:p>
-                      <a:r>
-                        <a:rPr sz="750" b="0">
-                          <a:solidFill>
-                            <a:srgbClr val="1F1F1F"/>
-                          </a:solidFill>
-                          <a:latin typeface="微软雅黑"/>
-                        </a:rPr>
-                        <a:t>chart</a:t>
-                      </a:r>
-                    </a:p>
-                  </a:txBody>
-                  <a:tcPr marL="36000" marR="21600" marT="14400" marB="14400">
-                    <a:solidFill>
-                      <a:srgbClr val="FFFFFF"/>
-                    </a:solidFill>
-                  </a:tcPr>
-                </a:tc>
-                <a:tc>
-                  <a:txBody>
-                    <a:bodyPr wrap="square"/>
-                    <a:lstStyle/>
-                    <a:p>
-                      <a:r>
-                        <a:rPr sz="750" b="0">
-                          <a:solidFill>
-                            <a:srgbClr val="1F1F1F"/>
-                          </a:solidFill>
-                          <a:latin typeface="微软雅黑"/>
-                        </a:rPr>
-                        <a:t>chart_type</a:t>
-                      </a:r>
-                    </a:p>
-                  </a:txBody>
-                  <a:tcPr marL="36000" marR="21600" marT="14400" marB="14400">
-                    <a:solidFill>
-                      <a:srgbClr val="FFFFFF"/>
-                    </a:solidFill>
-                  </a:tcPr>
-                </a:tc>
-                <a:tc>
-                  <a:txBody>
-                    <a:bodyPr wrap="square"/>
-                    <a:lstStyle/>
-                    <a:p>
-                      <a:r>
-                        <a:rPr sz="750" b="0">
-                          <a:solidFill>
-                            <a:srgbClr val="1F1F1F"/>
-                          </a:solidFill>
-                          <a:latin typeface="微软雅黑"/>
-                        </a:rPr>
-                        <a:t>sql / nl2sql</a:t>
-                      </a:r>
-                    </a:p>
-                  </a:txBody>
-                  <a:tcPr marL="36000" marR="21600" marT="14400" marB="14400">
-                    <a:solidFill>
-                      <a:srgbClr val="FFFFFF"/>
-                    </a:solidFill>
-                  </a:tcPr>
-                </a:tc>
-                <a:tc>
-                  <a:txBody>
-                    <a:bodyPr wrap="square"/>
-                    <a:lstStyle/>
-                    <a:p>
-                      <a:r>
-                        <a:rPr sz="750" b="0">
-                          <a:solidFill>
-                            <a:srgbClr val="1F1F1F"/>
-                          </a:solidFill>
-                          <a:latin typeface="微软雅黑"/>
-                        </a:rPr>
-                        <a:t>可视化图形（bar / line / pie …）</a:t>
-                      </a:r>
-                    </a:p>
-                  </a:txBody>
-                  <a:tcPr marL="36000" marR="21600" marT="14400" marB="14400">
-                    <a:solidFill>
-                      <a:srgbClr val="FFFFFF"/>
-                    </a:solidFill>
-                  </a:tcPr>
-                </a:tc>
-              </a:tr>
-              <a:tr h="192000">
-                <a:tc>
-                  <a:txBody>
-                    <a:bodyPr wrap="square"/>
-                    <a:lstStyle/>
-                    <a:p>
-                      <a:r>
-                        <a:rPr sz="750" b="0">
-                          <a:solidFill>
-                            <a:srgbClr val="1F1F1F"/>
-                          </a:solidFill>
-                          <a:latin typeface="微软雅黑"/>
-                        </a:rPr>
-                        <a:t>simple_table</a:t>
-                      </a:r>
-                    </a:p>
-                  </a:txBody>
-                  <a:tcPr marL="36000" marR="21600" marT="14400" marB="14400">
-                    <a:solidFill>
-                      <a:srgbClr val="F5F5F5"/>
-                    </a:solidFill>
-                  </a:tcPr>
-                </a:tc>
-                <a:tc>
-                  <a:txBody>
-                    <a:bodyPr wrap="square"/>
-                    <a:lstStyle/>
-                    <a:p>
-                      <a:r>
-                        <a:rPr sz="750" b="0">
-                          <a:solidFill>
-                            <a:srgbClr val="1F1F1F"/>
-                          </a:solidFill>
-                          <a:latin typeface="微软雅黑"/>
-                        </a:rPr>
-                        <a:t>—</a:t>
-                      </a:r>
-                    </a:p>
-                  </a:txBody>
-                  <a:tcPr marL="36000" marR="21600" marT="14400" marB="14400">
-                    <a:solidFill>
-                      <a:srgbClr val="F5F5F5"/>
-                    </a:solidFill>
-                  </a:tcPr>
-                </a:tc>
-                <a:tc>
-                  <a:txBody>
-                    <a:bodyPr wrap="square"/>
-                    <a:lstStyle/>
-                    <a:p>
-                      <a:r>
-                        <a:rPr sz="750" b="0">
-                          <a:solidFill>
-                            <a:srgbClr val="1F1F1F"/>
-                          </a:solidFill>
-                          <a:latin typeface="微软雅黑"/>
-                        </a:rPr>
-                        <a:t>sql / nl2sql</a:t>
-                      </a:r>
-                    </a:p>
-                  </a:txBody>
-                  <a:tcPr marL="36000" marR="21600" marT="14400" marB="14400">
-                    <a:solidFill>
-                      <a:srgbClr val="F5F5F5"/>
-                    </a:solidFill>
-                  </a:tcPr>
-                </a:tc>
-                <a:tc>
-                  <a:txBody>
-                    <a:bodyPr wrap="square"/>
-                    <a:lstStyle/>
-                    <a:p>
-                      <a:r>
-                        <a:rPr sz="750" b="0">
-                          <a:solidFill>
-                            <a:srgbClr val="1F1F1F"/>
-                          </a:solidFill>
-                          <a:latin typeface="微软雅黑"/>
-                        </a:rPr>
-                        <a:t>普通二维明细表格</a:t>
-                      </a:r>
-                    </a:p>
-                  </a:txBody>
-                  <a:tcPr marL="36000" marR="21600" marT="14400" marB="14400">
-                    <a:solidFill>
-                      <a:srgbClr val="F5F5F5"/>
-                    </a:solidFill>
-                  </a:tcPr>
-                </a:tc>
-              </a:tr>
-              <a:tr h="192000">
-                <a:tc>
-                  <a:txBody>
-                    <a:bodyPr wrap="square"/>
-                    <a:lstStyle/>
-                    <a:p>
-                      <a:r>
-                        <a:rPr sz="750" b="0">
-                          <a:solidFill>
-                            <a:srgbClr val="1F1F1F"/>
-                          </a:solidFill>
-                          <a:latin typeface="微软雅黑"/>
-                        </a:rPr>
-                        <a:t>composite_table</a:t>
-                      </a:r>
-                    </a:p>
-                  </a:txBody>
-                  <a:tcPr marL="36000" marR="21600" marT="14400" marB="14400">
-                    <a:solidFill>
-                      <a:srgbClr val="FFFFFF"/>
-                    </a:solidFill>
-                  </a:tcPr>
-                </a:tc>
-                <a:tc>
-                  <a:txBody>
-                    <a:bodyPr wrap="square"/>
-                    <a:lstStyle/>
-                    <a:p>
-                      <a:r>
-                        <a:rPr sz="750" b="0">
-                          <a:solidFill>
-                            <a:srgbClr val="1F1F1F"/>
-                          </a:solidFill>
-                          <a:latin typeface="微软雅黑"/>
-                        </a:rPr>
-                        <a:t>columns, sections[]</a:t>
-                      </a:r>
-                    </a:p>
-                  </a:txBody>
-                  <a:tcPr marL="36000" marR="21600" marT="14400" marB="14400">
-                    <a:solidFill>
-                      <a:srgbClr val="FFFFFF"/>
-                    </a:solidFill>
-                  </a:tcPr>
-                </a:tc>
-                <a:tc>
-                  <a:txBody>
-                    <a:bodyPr wrap="square"/>
-                    <a:lstStyle/>
-                    <a:p>
-                      <a:r>
-                        <a:rPr sz="750" b="0">
-                          <a:solidFill>
-                            <a:srgbClr val="1F1F1F"/>
-                          </a:solidFill>
-                          <a:latin typeface="微软雅黑"/>
-                        </a:rPr>
-                        <a:t>sql / ai_synthesis</a:t>
-                      </a:r>
-                    </a:p>
-                  </a:txBody>
-                  <a:tcPr marL="36000" marR="21600" marT="14400" marB="14400">
-                    <a:solidFill>
-                      <a:srgbClr val="FFFFFF"/>
-                    </a:solidFill>
-                  </a:tcPr>
-                </a:tc>
-                <a:tc>
-                  <a:txBody>
-                    <a:bodyPr wrap="square"/>
-                    <a:lstStyle/>
-                    <a:p>
-                      <a:r>
-                        <a:rPr sz="750" b="0">
-                          <a:solidFill>
-                            <a:srgbClr val="1F1F1F"/>
-                          </a:solidFill>
-                          <a:latin typeface="微软雅黑"/>
-                        </a:rPr>
-                        <a:t>复合合并表格（见下方）</a:t>
-                      </a:r>
-                    </a:p>
-                  </a:txBody>
-                  <a:tcPr marL="36000" marR="21600" marT="14400" marB="14400">
-                    <a:solidFill>
-                      <a:srgbClr val="FFFFFF"/>
-                    </a:solidFill>
-                  </a:tcPr>
-                </a:tc>
-              </a:tr>
-            </a:tbl>
-          </a:graphicData>
-        </a:graphic>
-      </p:graphicFrame>
-      <p:sp>
-        <p:nvSpPr>
-          <p:cNvPr id="24" name="Rectangle 23"/>
+        </p:nvSpPr>
+        <p:spPr>
+          <a:xfrm>
+            <a:off x="5220000" y="4608000"/>
+            <a:ext cx="6768000" cy="540000"/>
+          </a:xfrm>
+          <a:prstGeom prst="rect">
+            <a:avLst/>
+          </a:prstGeom>
+          <a:noFill/>
+        </p:spPr>
+        <p:txBody>
+          <a:bodyPr wrap="square">
+            <a:spAutoFit/>
+          </a:bodyPr>
+          <a:lstStyle/>
+          <a:p>
+            <a:pPr algn="l">
+              <a:spcAft>
+                <a:spcPts val="200"/>
+              </a:spcAft>
+            </a:pPr>
+            <a:r>
+              <a:rPr sz="850" b="0">
+                <a:solidFill>
+                  <a:srgbClr val="1F1F1F"/>
+                </a:solidFill>
+                <a:latin typeface="微软雅黑"/>
+              </a:rPr>
+              <a:t>当一个参数被声明为 `multi: true`，系统的章节可通过 `foreach` 高效按值复制：
+例如 `device_ids = [A001, A002]`，引擎会将该 chapter 克隆为两大份，内部 {$device} 变量独立。</a:t>
+            </a:r>
+          </a:p>
+        </p:txBody>
+      </p:sp>
+    </p:spTree>
+  </p:cSld>
+  <p:clrMapOvr>
+    <a:masterClrMapping/>
+  </p:clrMapOvr>
+</p:sld>
+</file>
+
+<file path=ppt/slides/slide2.xml><?xml version="1.0" encoding="utf-8"?>
+<p:sld xmlns:a="http://schemas.openxmlformats.org/drawingml/2006/main" xmlns:p="http://schemas.openxmlformats.org/presentationml/2006/main" xmlns:r="http://schemas.openxmlformats.org/officeDocument/2006/relationships">
+  <p:cSld>
+    <p:spTree>
+      <p:nvGrpSpPr>
+        <p:cNvPr id="1" name=""/>
+        <p:cNvGrpSpPr/>
+        <p:nvPr/>
+      </p:nvGrpSpPr>
+      <p:grpSpPr/>
+      <p:sp>
+        <p:nvSpPr>
+          <p:cNvPr id="2" name="Rectangle 1"/>
           <p:cNvSpPr/>
           <p:nvPr/>
         </p:nvSpPr>
         <p:spPr>
           <a:xfrm>
-            <a:off x="180000" y="5468400"/>
+            <a:off x="0" y="0"/>
+            <a:ext cx="12193200" cy="6858000"/>
+          </a:xfrm>
+          <a:prstGeom prst="rect">
+            <a:avLst/>
+          </a:prstGeom>
+          <a:solidFill>
+            <a:srgbClr val="FFFFFF"/>
+          </a:solidFill>
+          <a:ln>
+            <a:noFill/>
+          </a:ln>
+        </p:spPr>
+        <p:style>
+          <a:lnRef idx="1">
+            <a:schemeClr val="accent1"/>
+          </a:lnRef>
+          <a:fillRef idx="3">
+            <a:schemeClr val="accent1"/>
+          </a:fillRef>
+          <a:effectRef idx="2">
+            <a:schemeClr val="accent1"/>
+          </a:effectRef>
+          <a:fontRef idx="minor">
+            <a:schemeClr val="lt1"/>
+          </a:fontRef>
+        </p:style>
+        <p:txBody>
+          <a:bodyPr rtlCol="0" anchor="ctr"/>
+          <a:lstStyle/>
+          <a:p>
+            <a:pPr algn="ctr"/>
+          </a:p>
+        </p:txBody>
+      </p:sp>
+      <p:sp>
+        <p:nvSpPr>
+          <p:cNvPr id="3" name="Rectangle 2"/>
+          <p:cNvSpPr/>
+          <p:nvPr/>
+        </p:nvSpPr>
+        <p:spPr>
+          <a:xfrm>
+            <a:off x="0" y="0"/>
+            <a:ext cx="12193200" cy="864000"/>
+          </a:xfrm>
+          <a:prstGeom prst="rect">
+            <a:avLst/>
+          </a:prstGeom>
+          <a:solidFill>
+            <a:srgbClr val="C7000F"/>
+          </a:solidFill>
+          <a:ln>
+            <a:noFill/>
+          </a:ln>
+        </p:spPr>
+        <p:style>
+          <a:lnRef idx="1">
+            <a:schemeClr val="accent1"/>
+          </a:lnRef>
+          <a:fillRef idx="3">
+            <a:schemeClr val="accent1"/>
+          </a:fillRef>
+          <a:effectRef idx="2">
+            <a:schemeClr val="accent1"/>
+          </a:effectRef>
+          <a:fontRef idx="minor">
+            <a:schemeClr val="lt1"/>
+          </a:fontRef>
+        </p:style>
+        <p:txBody>
+          <a:bodyPr rtlCol="0" anchor="ctr"/>
+          <a:lstStyle/>
+          <a:p>
+            <a:pPr algn="ctr"/>
+          </a:p>
+        </p:txBody>
+      </p:sp>
+      <p:sp>
+        <p:nvSpPr>
+          <p:cNvPr id="4" name="Rectangle 3"/>
+          <p:cNvSpPr/>
+          <p:nvPr/>
+        </p:nvSpPr>
+        <p:spPr>
+          <a:xfrm>
+            <a:off x="0" y="6678000"/>
+            <a:ext cx="12193200" cy="180000"/>
+          </a:xfrm>
+          <a:prstGeom prst="rect">
+            <a:avLst/>
+          </a:prstGeom>
+          <a:solidFill>
+            <a:srgbClr val="C7000F"/>
+          </a:solidFill>
+          <a:ln>
+            <a:noFill/>
+          </a:ln>
+        </p:spPr>
+        <p:style>
+          <a:lnRef idx="1">
+            <a:schemeClr val="accent1"/>
+          </a:lnRef>
+          <a:fillRef idx="3">
+            <a:schemeClr val="accent1"/>
+          </a:fillRef>
+          <a:effectRef idx="2">
+            <a:schemeClr val="accent1"/>
+          </a:effectRef>
+          <a:fontRef idx="minor">
+            <a:schemeClr val="lt1"/>
+          </a:fontRef>
+        </p:style>
+        <p:txBody>
+          <a:bodyPr rtlCol="0" anchor="ctr"/>
+          <a:lstStyle/>
+          <a:p>
+            <a:pPr algn="ctr"/>
+          </a:p>
+        </p:txBody>
+      </p:sp>
+      <p:sp>
+        <p:nvSpPr>
+          <p:cNvPr id="5" name="Rectangle 4"/>
+          <p:cNvSpPr/>
+          <p:nvPr/>
+        </p:nvSpPr>
+        <p:spPr>
+          <a:xfrm>
+            <a:off x="5040000" y="900000"/>
+            <a:ext cx="21600" cy="5724000"/>
+          </a:xfrm>
+          <a:prstGeom prst="rect">
+            <a:avLst/>
+          </a:prstGeom>
+          <a:solidFill>
+            <a:srgbClr val="DDDDDD"/>
+          </a:solidFill>
+          <a:ln>
+            <a:noFill/>
+          </a:ln>
+        </p:spPr>
+        <p:style>
+          <a:lnRef idx="1">
+            <a:schemeClr val="accent1"/>
+          </a:lnRef>
+          <a:fillRef idx="3">
+            <a:schemeClr val="accent1"/>
+          </a:fillRef>
+          <a:effectRef idx="2">
+            <a:schemeClr val="accent1"/>
+          </a:effectRef>
+          <a:fontRef idx="minor">
+            <a:schemeClr val="lt1"/>
+          </a:fontRef>
+        </p:style>
+        <p:txBody>
+          <a:bodyPr rtlCol="0" anchor="ctr"/>
+          <a:lstStyle/>
+          <a:p>
+            <a:pPr algn="ctr"/>
+          </a:p>
+        </p:txBody>
+      </p:sp>
+      <p:sp>
+        <p:nvSpPr>
+          <p:cNvPr id="6" name="TextBox 5"/>
+          <p:cNvSpPr txBox="1"/>
+          <p:nvPr/>
+        </p:nvSpPr>
+        <p:spPr>
+          <a:xfrm>
+            <a:off x="360000" y="72000"/>
+            <a:ext cx="10800000" cy="468000"/>
+          </a:xfrm>
+          <a:prstGeom prst="rect">
+            <a:avLst/>
+          </a:prstGeom>
+          <a:noFill/>
+        </p:spPr>
+        <p:txBody>
+          <a:bodyPr wrap="square">
+            <a:spAutoFit/>
+          </a:bodyPr>
+          <a:lstStyle/>
+          <a:p>
+            <a:pPr algn="l">
+              <a:spcAft>
+                <a:spcPts val="200"/>
+              </a:spcAft>
+            </a:pPr>
+            <a:r>
+              <a:rPr sz="2000" b="1">
+                <a:solidFill>
+                  <a:srgbClr val="FFFFFF"/>
+                </a:solidFill>
+                <a:latin typeface="微软雅黑"/>
+              </a:rPr>
+              <a:t>智能报告模板系统  ·  复合表格独立定义 (composite_table)</a:t>
+            </a:r>
+          </a:p>
+        </p:txBody>
+      </p:sp>
+      <p:sp>
+        <p:nvSpPr>
+          <p:cNvPr id="7" name="TextBox 6"/>
+          <p:cNvSpPr txBox="1"/>
+          <p:nvPr/>
+        </p:nvSpPr>
+        <p:spPr>
+          <a:xfrm>
+            <a:off x="360000" y="522000"/>
+            <a:ext cx="11520000" cy="288000"/>
+          </a:xfrm>
+          <a:prstGeom prst="rect">
+            <a:avLst/>
+          </a:prstGeom>
+          <a:noFill/>
+        </p:spPr>
+        <p:txBody>
+          <a:bodyPr wrap="square">
+            <a:spAutoFit/>
+          </a:bodyPr>
+          <a:lstStyle/>
+          <a:p>
+            <a:pPr algn="l">
+              <a:spcAft>
+                <a:spcPts val="200"/>
+              </a:spcAft>
+            </a:pPr>
+            <a:r>
+              <a:rPr sz="800" b="0">
+                <a:solidFill>
+                  <a:srgbClr val="FFCCCC"/>
+                </a:solidFill>
+                <a:latin typeface="微软雅黑"/>
+              </a:rPr>
+              <a:t>Local DAG  |  Dataset Binding  |  ai_synthesis  |  kv_grid  |  tabular  |  Cross-referencing</a:t>
+            </a:r>
+          </a:p>
+        </p:txBody>
+      </p:sp>
+      <p:sp>
+        <p:nvSpPr>
+          <p:cNvPr id="8" name="TextBox 7"/>
+          <p:cNvSpPr txBox="1"/>
+          <p:nvPr/>
+        </p:nvSpPr>
+        <p:spPr>
+          <a:xfrm>
+            <a:off x="360000" y="6678000"/>
+            <a:ext cx="7200000" cy="172800"/>
+          </a:xfrm>
+          <a:prstGeom prst="rect">
+            <a:avLst/>
+          </a:prstGeom>
+          <a:noFill/>
+        </p:spPr>
+        <p:txBody>
+          <a:bodyPr wrap="square">
+            <a:spAutoFit/>
+          </a:bodyPr>
+          <a:lstStyle/>
+          <a:p>
+            <a:pPr algn="l">
+              <a:spcAft>
+                <a:spcPts val="200"/>
+              </a:spcAft>
+            </a:pPr>
+            <a:r>
+              <a:rPr sz="700" b="0">
+                <a:solidFill>
+                  <a:srgbClr val="FFFFFF"/>
+                </a:solidFill>
+                <a:latin typeface="微软雅黑"/>
+              </a:rPr>
+              <a:t>© Report Template System v2.0  |  2026-03</a:t>
+            </a:r>
+          </a:p>
+        </p:txBody>
+      </p:sp>
+      <p:sp>
+        <p:nvSpPr>
+          <p:cNvPr id="9" name="Rectangle 8"/>
+          <p:cNvSpPr/>
+          <p:nvPr/>
+        </p:nvSpPr>
+        <p:spPr>
+          <a:xfrm>
+            <a:off x="180000" y="1004400"/>
             <a:ext cx="64800" cy="158400"/>
           </a:xfrm>
           <a:prstGeom prst="rect">
@@ -6135,14 +5250,14 @@
       </p:sp>
       <p:sp>
         <p:nvSpPr>
-          <p:cNvPr id="25" name="TextBox 24"/>
+          <p:cNvPr id="10" name="TextBox 9"/>
           <p:cNvSpPr txBox="1"/>
           <p:nvPr/>
         </p:nvSpPr>
         <p:spPr>
           <a:xfrm>
-            <a:off x="280800" y="5436000"/>
-            <a:ext cx="11880000" cy="208800"/>
+            <a:off x="280800" y="961200"/>
+            <a:ext cx="5400000" cy="208800"/>
           </a:xfrm>
           <a:prstGeom prst="rect">
             <a:avLst/>
@@ -6150,35 +5265,750 @@
           <a:noFill/>
         </p:spPr>
         <p:txBody>
-          <a:bodyPr wrap="none">
+          <a:bodyPr wrap="square">
             <a:spAutoFit/>
           </a:bodyPr>
           <a:lstStyle/>
           <a:p>
-            <a:pPr algn="l"/>
-            <a:r>
-              <a:rPr sz="850" b="1">
+            <a:pPr algn="l">
+              <a:spcAft>
+                <a:spcPts val="200"/>
+              </a:spcAft>
+            </a:pPr>
+            <a:r>
+              <a:rPr sz="900" b="1">
                 <a:solidFill>
                   <a:srgbClr val="C7000F"/>
                 </a:solidFill>
                 <a:latin typeface="微软雅黑"/>
               </a:rPr>
-              <a:t>复合表格分区布局（composite_table  sections[]  layout）</a:t>
+              <a:t>复合表格内部树状结构 (content 节点)</a:t>
+            </a:r>
+          </a:p>
+        </p:txBody>
+      </p:sp>
+      <p:sp>
+        <p:nvSpPr>
+          <p:cNvPr id="11" name="TextBox 10"/>
+          <p:cNvSpPr txBox="1"/>
+          <p:nvPr/>
+        </p:nvSpPr>
+        <p:spPr>
+          <a:xfrm>
+            <a:off x="144000" y="1260000"/>
+            <a:ext cx="4680000" cy="5220000"/>
+          </a:xfrm>
+          <a:prstGeom prst="rect">
+            <a:avLst/>
+          </a:prstGeom>
+          <a:noFill/>
+        </p:spPr>
+        <p:txBody>
+          <a:bodyPr wrap="none">
+            <a:spAutoFit/>
+          </a:bodyPr>
+          <a:lstStyle/>
+          <a:p>
+            <a:pPr algn="l">
+              <a:spcAft>
+                <a:spcPts val="400"/>
+              </a:spcAft>
+            </a:pPr>
+            <a:r>
+              <a:rPr sz="850">
+                <a:solidFill>
+                  <a:srgbClr val="1F1F1F"/>
+                </a:solidFill>
+                <a:latin typeface="Consolas"/>
+              </a:rPr>
+              <a:t>[content]
+ ├── datasets[]                 (局部数据池/DAG图)
+ │    ├── id: string            (必须全局唯一, eg: "ds_a")
+ │    ├── depends_on[]: string  (等待另一数据源完成)
+ │    └── source: object
+ │         ├── kind: enum       (sql | nl2sql | ai_synthesis)
+ │         ├── query / description 
+ │         └── context          (★ ai_synthesis 专用)
+ │              ├── refs[]      (引用同表格内已就绪的 dataset)
+ │              └── queries[]   (额外补充查询)
+ │         └── knowledge        (★ ai_synthesis 专用 RAG)
+ │              └── params      (subject, symptoms, obj)
+ │         └── prompt           (LLM 指令和框架)
+ │
+ └── presentation: object       (视图呈现布局)
+      ├── type: "composite_table"
+      ├── columns: integer      (网格总列数, eg: 8)
+      └── sections[]: array     (从上至下的表格区段)
+           ├── band: string     (可选, 合并列的首行标题)
+           ├── dataset_id: str  (★ 绑定数据池的 id)
+           └── layout: object   (布局渲染引擎)
+                │
+                ├── [type = kv_grid] (键值对区段)
+                │    ├── cols_per_row, key_span, val_span
+                │    └── fields[] (key, value/col)
+                │
+                └── [type = tabular] (行列表明细)
+                     ├── headers[] (label, span, repeat)
+                     └── columns[] (field, span, repeat)</a:t>
+            </a:r>
+          </a:p>
+        </p:txBody>
+      </p:sp>
+      <p:sp>
+        <p:nvSpPr>
+          <p:cNvPr id="12" name="Rectangle 11"/>
+          <p:cNvSpPr/>
+          <p:nvPr/>
+        </p:nvSpPr>
+        <p:spPr>
+          <a:xfrm>
+            <a:off x="5220000" y="1004400"/>
+            <a:ext cx="64800" cy="158400"/>
+          </a:xfrm>
+          <a:prstGeom prst="rect">
+            <a:avLst/>
+          </a:prstGeom>
+          <a:solidFill>
+            <a:srgbClr val="C7000F"/>
+          </a:solidFill>
+          <a:ln>
+            <a:noFill/>
+          </a:ln>
+        </p:spPr>
+        <p:style>
+          <a:lnRef idx="1">
+            <a:schemeClr val="accent1"/>
+          </a:lnRef>
+          <a:fillRef idx="3">
+            <a:schemeClr val="accent1"/>
+          </a:fillRef>
+          <a:effectRef idx="2">
+            <a:schemeClr val="accent1"/>
+          </a:effectRef>
+          <a:fontRef idx="minor">
+            <a:schemeClr val="lt1"/>
+          </a:fontRef>
+        </p:style>
+        <p:txBody>
+          <a:bodyPr rtlCol="0" anchor="ctr"/>
+          <a:lstStyle/>
+          <a:p>
+            <a:pPr algn="ctr"/>
+          </a:p>
+        </p:txBody>
+      </p:sp>
+      <p:sp>
+        <p:nvSpPr>
+          <p:cNvPr id="13" name="TextBox 12"/>
+          <p:cNvSpPr txBox="1"/>
+          <p:nvPr/>
+        </p:nvSpPr>
+        <p:spPr>
+          <a:xfrm>
+            <a:off x="5320800" y="961200"/>
+            <a:ext cx="6768000" cy="208800"/>
+          </a:xfrm>
+          <a:prstGeom prst="rect">
+            <a:avLst/>
+          </a:prstGeom>
+          <a:noFill/>
+        </p:spPr>
+        <p:txBody>
+          <a:bodyPr wrap="square">
+            <a:spAutoFit/>
+          </a:bodyPr>
+          <a:lstStyle/>
+          <a:p>
+            <a:pPr algn="l">
+              <a:spcAft>
+                <a:spcPts val="200"/>
+              </a:spcAft>
+            </a:pPr>
+            <a:r>
+              <a:rPr sz="900" b="1">
+                <a:solidFill>
+                  <a:srgbClr val="C7000F"/>
+                </a:solidFill>
+                <a:latin typeface="微软雅黑"/>
+              </a:rPr>
+              <a:t>1. 局部数据依赖执行顺序图 (DAG 解析法则)</a:t>
+            </a:r>
+          </a:p>
+        </p:txBody>
+      </p:sp>
+      <p:sp>
+        <p:nvSpPr>
+          <p:cNvPr id="14" name="TextBox 13"/>
+          <p:cNvSpPr txBox="1"/>
+          <p:nvPr/>
+        </p:nvSpPr>
+        <p:spPr>
+          <a:xfrm>
+            <a:off x="5220000" y="1188000"/>
+            <a:ext cx="6768000" cy="360000"/>
+          </a:xfrm>
+          <a:prstGeom prst="rect">
+            <a:avLst/>
+          </a:prstGeom>
+          <a:noFill/>
+        </p:spPr>
+        <p:txBody>
+          <a:bodyPr wrap="square">
+            <a:spAutoFit/>
+          </a:bodyPr>
+          <a:lstStyle/>
+          <a:p>
+            <a:pPr algn="l">
+              <a:spcAft>
+                <a:spcPts val="200"/>
+              </a:spcAft>
+            </a:pPr>
+            <a:r>
+              <a:rPr sz="850" b="0">
+                <a:solidFill>
+                  <a:srgbClr val="1F1F1F"/>
+                </a:solidFill>
+                <a:latin typeface="微软雅黑"/>
+              </a:rPr>
+              <a:t>引擎读取 datasets，分析 depends_on。无依赖节点（如 SQL 1, SQL 2）线程并发执行。
+ai_synthesis 拥有显式 depends_on，引擎等待前置 SQL 就绪后再执行大模型合成逻辑：</a:t>
+            </a:r>
+          </a:p>
+        </p:txBody>
+      </p:sp>
+      <p:sp>
+        <p:nvSpPr>
+          <p:cNvPr id="15" name="Rectangle 14"/>
+          <p:cNvSpPr/>
+          <p:nvPr/>
+        </p:nvSpPr>
+        <p:spPr>
+          <a:xfrm>
+            <a:off x="5400000" y="1584000"/>
+            <a:ext cx="1080000" cy="288000"/>
+          </a:xfrm>
+          <a:prstGeom prst="rect">
+            <a:avLst/>
+          </a:prstGeom>
+          <a:solidFill>
+            <a:srgbClr val="F5F5F5"/>
+          </a:solidFill>
+        </p:spPr>
+        <p:style>
+          <a:lnRef idx="1">
+            <a:schemeClr val="accent1"/>
+          </a:lnRef>
+          <a:fillRef idx="3">
+            <a:schemeClr val="accent1"/>
+          </a:fillRef>
+          <a:effectRef idx="2">
+            <a:schemeClr val="accent1"/>
+          </a:effectRef>
+          <a:fontRef idx="minor">
+            <a:schemeClr val="lt1"/>
+          </a:fontRef>
+        </p:style>
+        <p:txBody>
+          <a:bodyPr rtlCol="0" anchor="ctr"/>
+          <a:lstStyle/>
+          <a:p>
+            <a:pPr algn="ctr"/>
+          </a:p>
+        </p:txBody>
+      </p:sp>
+      <p:sp>
+        <p:nvSpPr>
+          <p:cNvPr id="16" name="TextBox 15"/>
+          <p:cNvSpPr txBox="1"/>
+          <p:nvPr/>
+        </p:nvSpPr>
+        <p:spPr>
+          <a:xfrm>
+            <a:off x="5400000" y="1584000"/>
+            <a:ext cx="1080000" cy="288000"/>
+          </a:xfrm>
+          <a:prstGeom prst="rect">
+            <a:avLst/>
+          </a:prstGeom>
+          <a:noFill/>
+        </p:spPr>
+        <p:txBody>
+          <a:bodyPr wrap="square">
+            <a:spAutoFit/>
+          </a:bodyPr>
+          <a:lstStyle/>
+          <a:p>
+            <a:pPr algn="ctr">
+              <a:spcAft>
+                <a:spcPts val="200"/>
+              </a:spcAft>
+            </a:pPr>
+            <a:r>
+              <a:rPr sz="800" b="0">
+                <a:solidFill>
+                  <a:srgbClr val="1F1F1F"/>
+                </a:solidFill>
+                <a:latin typeface="微软雅黑"/>
+              </a:rPr>
+              <a:t>ds_base_sql
+(并发执行)</a:t>
+            </a:r>
+          </a:p>
+        </p:txBody>
+      </p:sp>
+      <p:sp>
+        <p:nvSpPr>
+          <p:cNvPr id="17" name="Rectangle 16"/>
+          <p:cNvSpPr/>
+          <p:nvPr/>
+        </p:nvSpPr>
+        <p:spPr>
+          <a:xfrm>
+            <a:off x="5400000" y="1944000"/>
+            <a:ext cx="1080000" cy="288000"/>
+          </a:xfrm>
+          <a:prstGeom prst="rect">
+            <a:avLst/>
+          </a:prstGeom>
+          <a:solidFill>
+            <a:srgbClr val="F5F5F5"/>
+          </a:solidFill>
+        </p:spPr>
+        <p:style>
+          <a:lnRef idx="1">
+            <a:schemeClr val="accent1"/>
+          </a:lnRef>
+          <a:fillRef idx="3">
+            <a:schemeClr val="accent1"/>
+          </a:fillRef>
+          <a:effectRef idx="2">
+            <a:schemeClr val="accent1"/>
+          </a:effectRef>
+          <a:fontRef idx="minor">
+            <a:schemeClr val="lt1"/>
+          </a:fontRef>
+        </p:style>
+        <p:txBody>
+          <a:bodyPr rtlCol="0" anchor="ctr"/>
+          <a:lstStyle/>
+          <a:p>
+            <a:pPr algn="ctr"/>
+          </a:p>
+        </p:txBody>
+      </p:sp>
+      <p:sp>
+        <p:nvSpPr>
+          <p:cNvPr id="18" name="TextBox 17"/>
+          <p:cNvSpPr txBox="1"/>
+          <p:nvPr/>
+        </p:nvSpPr>
+        <p:spPr>
+          <a:xfrm>
+            <a:off x="5400000" y="1944000"/>
+            <a:ext cx="1080000" cy="288000"/>
+          </a:xfrm>
+          <a:prstGeom prst="rect">
+            <a:avLst/>
+          </a:prstGeom>
+          <a:noFill/>
+        </p:spPr>
+        <p:txBody>
+          <a:bodyPr wrap="square">
+            <a:spAutoFit/>
+          </a:bodyPr>
+          <a:lstStyle/>
+          <a:p>
+            <a:pPr algn="ctr">
+              <a:spcAft>
+                <a:spcPts val="200"/>
+              </a:spcAft>
+            </a:pPr>
+            <a:r>
+              <a:rPr sz="800" b="0">
+                <a:solidFill>
+                  <a:srgbClr val="1F1F1F"/>
+                </a:solidFill>
+                <a:latin typeface="微软雅黑"/>
+              </a:rPr>
+              <a:t>ds_fault_sql
+(并发执行)</a:t>
+            </a:r>
+          </a:p>
+        </p:txBody>
+      </p:sp>
+      <p:sp>
+        <p:nvSpPr>
+          <p:cNvPr id="19" name="TextBox 18"/>
+          <p:cNvSpPr txBox="1"/>
+          <p:nvPr/>
+        </p:nvSpPr>
+        <p:spPr>
+          <a:xfrm>
+            <a:off x="6588000" y="1620000"/>
+            <a:ext cx="360000" cy="216000"/>
+          </a:xfrm>
+          <a:prstGeom prst="rect">
+            <a:avLst/>
+          </a:prstGeom>
+          <a:noFill/>
+        </p:spPr>
+        <p:txBody>
+          <a:bodyPr wrap="square">
+            <a:spAutoFit/>
+          </a:bodyPr>
+          <a:lstStyle/>
+          <a:p>
+            <a:pPr algn="l">
+              <a:spcAft>
+                <a:spcPts val="200"/>
+              </a:spcAft>
+            </a:pPr>
+            <a:r>
+              <a:rPr sz="1200" b="0">
+                <a:solidFill>
+                  <a:srgbClr val="C7000F"/>
+                </a:solidFill>
+                <a:latin typeface="微软雅黑"/>
+              </a:rPr>
+              <a:t>──▶</a:t>
+            </a:r>
+          </a:p>
+        </p:txBody>
+      </p:sp>
+      <p:sp>
+        <p:nvSpPr>
+          <p:cNvPr id="20" name="TextBox 19"/>
+          <p:cNvSpPr txBox="1"/>
+          <p:nvPr/>
+        </p:nvSpPr>
+        <p:spPr>
+          <a:xfrm>
+            <a:off x="6588000" y="1980000"/>
+            <a:ext cx="360000" cy="216000"/>
+          </a:xfrm>
+          <a:prstGeom prst="rect">
+            <a:avLst/>
+          </a:prstGeom>
+          <a:noFill/>
+        </p:spPr>
+        <p:txBody>
+          <a:bodyPr wrap="square">
+            <a:spAutoFit/>
+          </a:bodyPr>
+          <a:lstStyle/>
+          <a:p>
+            <a:pPr algn="l">
+              <a:spcAft>
+                <a:spcPts val="200"/>
+              </a:spcAft>
+            </a:pPr>
+            <a:r>
+              <a:rPr sz="1200" b="0">
+                <a:solidFill>
+                  <a:srgbClr val="C7000F"/>
+                </a:solidFill>
+                <a:latin typeface="微软雅黑"/>
+              </a:rPr>
+              <a:t>──▶</a:t>
+            </a:r>
+          </a:p>
+        </p:txBody>
+      </p:sp>
+      <p:sp>
+        <p:nvSpPr>
+          <p:cNvPr id="21" name="Rectangle 20"/>
+          <p:cNvSpPr/>
+          <p:nvPr/>
+        </p:nvSpPr>
+        <p:spPr>
+          <a:xfrm>
+            <a:off x="7092000" y="1728000"/>
+            <a:ext cx="1440000" cy="360000"/>
+          </a:xfrm>
+          <a:prstGeom prst="rect">
+            <a:avLst/>
+          </a:prstGeom>
+          <a:solidFill>
+            <a:srgbClr val="C7000F"/>
+          </a:solidFill>
+          <a:ln>
+            <a:noFill/>
+          </a:ln>
+        </p:spPr>
+        <p:style>
+          <a:lnRef idx="1">
+            <a:schemeClr val="accent1"/>
+          </a:lnRef>
+          <a:fillRef idx="3">
+            <a:schemeClr val="accent1"/>
+          </a:fillRef>
+          <a:effectRef idx="2">
+            <a:schemeClr val="accent1"/>
+          </a:effectRef>
+          <a:fontRef idx="minor">
+            <a:schemeClr val="lt1"/>
+          </a:fontRef>
+        </p:style>
+        <p:txBody>
+          <a:bodyPr rtlCol="0" anchor="ctr"/>
+          <a:lstStyle/>
+          <a:p>
+            <a:pPr algn="ctr"/>
+          </a:p>
+        </p:txBody>
+      </p:sp>
+      <p:sp>
+        <p:nvSpPr>
+          <p:cNvPr id="22" name="TextBox 21"/>
+          <p:cNvSpPr txBox="1"/>
+          <p:nvPr/>
+        </p:nvSpPr>
+        <p:spPr>
+          <a:xfrm>
+            <a:off x="7092000" y="1728000"/>
+            <a:ext cx="1440000" cy="360000"/>
+          </a:xfrm>
+          <a:prstGeom prst="rect">
+            <a:avLst/>
+          </a:prstGeom>
+          <a:noFill/>
+        </p:spPr>
+        <p:txBody>
+          <a:bodyPr wrap="square">
+            <a:spAutoFit/>
+          </a:bodyPr>
+          <a:lstStyle/>
+          <a:p>
+            <a:pPr algn="ctr">
+              <a:spcAft>
+                <a:spcPts val="200"/>
+              </a:spcAft>
+            </a:pPr>
+            <a:r>
+              <a:rPr sz="800" b="0">
+                <a:solidFill>
+                  <a:srgbClr val="FFFFFF"/>
+                </a:solidFill>
+                <a:latin typeface="微软雅黑"/>
+              </a:rPr>
+              <a:t>ds_ai_summary
+(等待两前置完成, 提取 refs)</a:t>
+            </a:r>
+          </a:p>
+        </p:txBody>
+      </p:sp>
+      <p:sp>
+        <p:nvSpPr>
+          <p:cNvPr id="23" name="TextBox 22"/>
+          <p:cNvSpPr txBox="1"/>
+          <p:nvPr/>
+        </p:nvSpPr>
+        <p:spPr>
+          <a:xfrm>
+            <a:off x="8640000" y="1764000"/>
+            <a:ext cx="360000" cy="216000"/>
+          </a:xfrm>
+          <a:prstGeom prst="rect">
+            <a:avLst/>
+          </a:prstGeom>
+          <a:noFill/>
+        </p:spPr>
+        <p:txBody>
+          <a:bodyPr wrap="square">
+            <a:spAutoFit/>
+          </a:bodyPr>
+          <a:lstStyle/>
+          <a:p>
+            <a:pPr algn="l">
+              <a:spcAft>
+                <a:spcPts val="200"/>
+              </a:spcAft>
+            </a:pPr>
+            <a:r>
+              <a:rPr sz="1200" b="0">
+                <a:solidFill>
+                  <a:srgbClr val="555555"/>
+                </a:solidFill>
+                <a:latin typeface="微软雅黑"/>
+              </a:rPr>
+              <a:t>──▶</a:t>
+            </a:r>
+          </a:p>
+        </p:txBody>
+      </p:sp>
+      <p:sp>
+        <p:nvSpPr>
+          <p:cNvPr id="24" name="Rectangle 23"/>
+          <p:cNvSpPr/>
+          <p:nvPr/>
+        </p:nvSpPr>
+        <p:spPr>
+          <a:xfrm>
+            <a:off x="9108000" y="1728000"/>
+            <a:ext cx="1007999" cy="360000"/>
+          </a:xfrm>
+          <a:prstGeom prst="rect">
+            <a:avLst/>
+          </a:prstGeom>
+          <a:solidFill>
+            <a:srgbClr val="F5F5F5"/>
+          </a:solidFill>
+        </p:spPr>
+        <p:style>
+          <a:lnRef idx="1">
+            <a:schemeClr val="accent1"/>
+          </a:lnRef>
+          <a:fillRef idx="3">
+            <a:schemeClr val="accent1"/>
+          </a:fillRef>
+          <a:effectRef idx="2">
+            <a:schemeClr val="accent1"/>
+          </a:effectRef>
+          <a:fontRef idx="minor">
+            <a:schemeClr val="lt1"/>
+          </a:fontRef>
+        </p:style>
+        <p:txBody>
+          <a:bodyPr rtlCol="0" anchor="ctr"/>
+          <a:lstStyle/>
+          <a:p>
+            <a:pPr algn="ctr"/>
+          </a:p>
+        </p:txBody>
+      </p:sp>
+      <p:sp>
+        <p:nvSpPr>
+          <p:cNvPr id="25" name="TextBox 24"/>
+          <p:cNvSpPr txBox="1"/>
+          <p:nvPr/>
+        </p:nvSpPr>
+        <p:spPr>
+          <a:xfrm>
+            <a:off x="9108000" y="1728000"/>
+            <a:ext cx="1007999" cy="360000"/>
+          </a:xfrm>
+          <a:prstGeom prst="rect">
+            <a:avLst/>
+          </a:prstGeom>
+          <a:noFill/>
+        </p:spPr>
+        <p:txBody>
+          <a:bodyPr wrap="square">
+            <a:spAutoFit/>
+          </a:bodyPr>
+          <a:lstStyle/>
+          <a:p>
+            <a:pPr algn="ctr">
+              <a:spcAft>
+                <a:spcPts val="200"/>
+              </a:spcAft>
+            </a:pPr>
+            <a:r>
+              <a:rPr sz="800" b="0">
+                <a:solidFill>
+                  <a:srgbClr val="1F1F1F"/>
+                </a:solidFill>
+                <a:latin typeface="微软雅黑"/>
+              </a:rPr>
+              <a:t>presentation
+各区段按序渲染</a:t>
+            </a:r>
+          </a:p>
+        </p:txBody>
+      </p:sp>
+      <p:sp>
+        <p:nvSpPr>
+          <p:cNvPr id="26" name="Rectangle 25"/>
+          <p:cNvSpPr/>
+          <p:nvPr/>
+        </p:nvSpPr>
+        <p:spPr>
+          <a:xfrm>
+            <a:off x="5220000" y="2444400"/>
+            <a:ext cx="64800" cy="158400"/>
+          </a:xfrm>
+          <a:prstGeom prst="rect">
+            <a:avLst/>
+          </a:prstGeom>
+          <a:solidFill>
+            <a:srgbClr val="C7000F"/>
+          </a:solidFill>
+          <a:ln>
+            <a:noFill/>
+          </a:ln>
+        </p:spPr>
+        <p:style>
+          <a:lnRef idx="1">
+            <a:schemeClr val="accent1"/>
+          </a:lnRef>
+          <a:fillRef idx="3">
+            <a:schemeClr val="accent1"/>
+          </a:fillRef>
+          <a:effectRef idx="2">
+            <a:schemeClr val="accent1"/>
+          </a:effectRef>
+          <a:fontRef idx="minor">
+            <a:schemeClr val="lt1"/>
+          </a:fontRef>
+        </p:style>
+        <p:txBody>
+          <a:bodyPr rtlCol="0" anchor="ctr"/>
+          <a:lstStyle/>
+          <a:p>
+            <a:pPr algn="ctr"/>
+          </a:p>
+        </p:txBody>
+      </p:sp>
+      <p:sp>
+        <p:nvSpPr>
+          <p:cNvPr id="27" name="TextBox 26"/>
+          <p:cNvSpPr txBox="1"/>
+          <p:nvPr/>
+        </p:nvSpPr>
+        <p:spPr>
+          <a:xfrm>
+            <a:off x="5320800" y="2401200"/>
+            <a:ext cx="6768000" cy="208800"/>
+          </a:xfrm>
+          <a:prstGeom prst="rect">
+            <a:avLst/>
+          </a:prstGeom>
+          <a:noFill/>
+        </p:spPr>
+        <p:txBody>
+          <a:bodyPr wrap="square">
+            <a:spAutoFit/>
+          </a:bodyPr>
+          <a:lstStyle/>
+          <a:p>
+            <a:pPr algn="l">
+              <a:spcAft>
+                <a:spcPts val="200"/>
+              </a:spcAft>
+            </a:pPr>
+            <a:r>
+              <a:rPr sz="900" b="1">
+                <a:solidFill>
+                  <a:srgbClr val="C7000F"/>
+                </a:solidFill>
+                <a:latin typeface="微软雅黑"/>
+              </a:rPr>
+              <a:t>2. 知识检索三要素 (ai_synthesis knowledge)</a:t>
             </a:r>
           </a:p>
         </p:txBody>
       </p:sp>
       <p:graphicFrame>
         <p:nvGraphicFramePr>
-          <p:cNvPr id="26" name="Table 25"/>
+          <p:cNvPr id="28" name="Table 27"/>
           <p:cNvGraphicFramePr>
             <a:graphicFrameLocks noGrp="1"/>
           </p:cNvGraphicFramePr>
           <p:nvPr/>
         </p:nvGraphicFramePr>
         <p:xfrm>
-          <a:off x="180000" y="5652000"/>
-          <a:ext cx="11880000" cy="936000"/>
+          <a:off x="5220000" y="2628000"/>
+          <a:ext cx="6767999" cy="720000"/>
         </p:xfrm>
         <a:graphic>
           <a:graphicData uri="http://schemas.openxmlformats.org/drawingml/2006/table">
@@ -6187,12 +6017,12 @@
                 <a:tableStyleId>{5C22544A-7EE6-4342-B048-85BDC9FD1C3A}</a:tableStyleId>
               </a:tblPr>
               <a:tblGrid>
-                <a:gridCol w="950400"/>
-                <a:gridCol w="2257200"/>
-                <a:gridCol w="3326400"/>
-                <a:gridCol w="5346000"/>
+                <a:gridCol w="541440"/>
+                <a:gridCol w="1082880"/>
+                <a:gridCol w="1895040"/>
+                <a:gridCol w="3248639"/>
               </a:tblGrid>
-              <a:tr h="312000">
+              <a:tr h="180000">
                 <a:tc>
                   <a:txBody>
                     <a:bodyPr wrap="square"/>
@@ -6205,11 +6035,11 @@
                           </a:solidFill>
                           <a:latin typeface="微软雅黑"/>
                         </a:rPr>
-                        <a:t>layout.type</a:t>
+                        <a:t>要素</a:t>
                       </a:r>
                     </a:p>
                   </a:txBody>
-                  <a:tcPr marL="36000" marR="21600" marT="14400" marB="14400">
+                  <a:tcPr marL="43200" marR="21600" marT="36000" marB="36000">
                     <a:solidFill>
                       <a:srgbClr val="C7000F"/>
                     </a:solidFill>
@@ -6227,11 +6057,11 @@
                           </a:solidFill>
                           <a:latin typeface="微软雅黑"/>
                         </a:rPr>
-                        <a:t>结构字段</a:t>
+                        <a:t>配置字段</a:t>
                       </a:r>
                     </a:p>
                   </a:txBody>
-                  <a:tcPr marL="36000" marR="21600" marT="14400" marB="14400">
+                  <a:tcPr marL="43200" marR="21600" marT="36000" marB="36000">
                     <a:solidFill>
                       <a:srgbClr val="C7000F"/>
                     </a:solidFill>
@@ -6249,11 +6079,11 @@
                           </a:solidFill>
                           <a:latin typeface="微软雅黑"/>
                         </a:rPr>
-                        <a:t>约束规则</a:t>
+                        <a:t>支持提取源</a:t>
                       </a:r>
                     </a:p>
                   </a:txBody>
-                  <a:tcPr marL="36000" marR="21600" marT="14400" marB="14400">
+                  <a:tcPr marL="43200" marR="21600" marT="36000" marB="36000">
                     <a:solidFill>
                       <a:srgbClr val="C7000F"/>
                     </a:solidFill>
@@ -6271,18 +6101,18 @@
                           </a:solidFill>
                           <a:latin typeface="微软雅黑"/>
                         </a:rPr>
-                        <a:t>数据填充方式</a:t>
+                        <a:t>说明 / 例子</a:t>
                       </a:r>
                     </a:p>
                   </a:txBody>
-                  <a:tcPr marL="36000" marR="21600" marT="14400" marB="14400">
+                  <a:tcPr marL="43200" marR="21600" marT="36000" marB="36000">
                     <a:solidFill>
                       <a:srgbClr val="C7000F"/>
                     </a:solidFill>
                   </a:tcPr>
                 </a:tc>
               </a:tr>
-              <a:tr h="312000">
+              <a:tr h="180000">
                 <a:tc>
                   <a:txBody>
                     <a:bodyPr wrap="square"/>
@@ -6295,11 +6125,11 @@
                           </a:solidFill>
                           <a:latin typeface="微软雅黑"/>
                         </a:rPr>
-                        <a:t>kv_grid</a:t>
+                        <a:t>主体</a:t>
                       </a:r>
                     </a:p>
                   </a:txBody>
-                  <a:tcPr marL="36000" marR="21600" marT="14400" marB="14400">
+                  <a:tcPr marL="43200" marR="21600" marT="36000" marB="36000">
                     <a:solidFill>
                       <a:srgbClr val="FFFFFF"/>
                     </a:solidFill>
@@ -6317,11 +6147,11 @@
                           </a:solidFill>
                           <a:latin typeface="微软雅黑"/>
                         </a:rPr>
-                        <a:t>cols_per_row · key_span · value_span · fields[]</a:t>
+                        <a:t>subject</a:t>
                       </a:r>
                     </a:p>
                   </a:txBody>
-                  <a:tcPr marL="36000" marR="21600" marT="14400" marB="14400">
+                  <a:tcPr marL="43200" marR="21600" marT="36000" marB="36000">
                     <a:solidFill>
                       <a:srgbClr val="FFFFFF"/>
                     </a:solidFill>
@@ -6339,11 +6169,11 @@
                           </a:solidFill>
                           <a:latin typeface="微软雅黑"/>
                         </a:rPr>
-                        <a:t>(key_span + value_span) × cols_per_row = columns；fields 不足末行以空白补齐</a:t>
+                        <a:t>全局参数 {param}</a:t>
                       </a:r>
                     </a:p>
                   </a:txBody>
-                  <a:tcPr marL="36000" marR="21600" marT="14400" marB="14400">
+                  <a:tcPr marL="43200" marR="21600" marT="36000" marB="36000">
                     <a:solidFill>
                       <a:srgbClr val="FFFFFF"/>
                     </a:solidFill>
@@ -6361,18 +6191,18 @@
                           </a:solidFill>
                           <a:latin typeface="微软雅黑"/>
                         </a:rPr>
-                        <a:t>fields[].value（参数直填）/ fields[].col（SQL 单行按列名）/ key_col + value_col（SQL 动态 KV 展开）</a:t>
+                        <a:t>是谁出问题？「西门子 S7-1200」</a:t>
                       </a:r>
                     </a:p>
                   </a:txBody>
-                  <a:tcPr marL="36000" marR="21600" marT="14400" marB="14400">
+                  <a:tcPr marL="43200" marR="21600" marT="36000" marB="36000">
                     <a:solidFill>
                       <a:srgbClr val="FFFFFF"/>
                     </a:solidFill>
                   </a:tcPr>
                 </a:tc>
               </a:tr>
-              <a:tr h="312000">
+              <a:tr h="180000">
                 <a:tc>
                   <a:txBody>
                     <a:bodyPr wrap="square"/>
@@ -6385,11 +6215,11 @@
                           </a:solidFill>
                           <a:latin typeface="微软雅黑"/>
                         </a:rPr>
-                        <a:t>tabular</a:t>
+                        <a:t>征兆</a:t>
                       </a:r>
                     </a:p>
                   </a:txBody>
-                  <a:tcPr marL="36000" marR="21600" marT="14400" marB="14400">
+                  <a:tcPr marL="43200" marR="21600" marT="36000" marB="36000">
                     <a:solidFill>
                       <a:srgbClr val="F5F5F5"/>
                     </a:solidFill>
@@ -6407,11 +6237,11 @@
                           </a:solidFill>
                           <a:latin typeface="微软雅黑"/>
                         </a:rPr>
-                        <a:t>headers[] · columns[]</a:t>
+                        <a:t>symptoms</a:t>
                       </a:r>
                     </a:p>
                   </a:txBody>
-                  <a:tcPr marL="36000" marR="21600" marT="14400" marB="14400">
+                  <a:tcPr marL="43200" marR="21600" marT="36000" marB="36000">
                     <a:solidFill>
                       <a:srgbClr val="F5F5F5"/>
                     </a:solidFill>
@@ -6429,11 +6259,11 @@
                           </a:solidFill>
                           <a:latin typeface="微软雅黑"/>
                         </a:rPr>
-                        <a:t>headers[].span 之和 = columns</a:t>
+                        <a:t>refs 引用 (如 ds_a.name)</a:t>
                       </a:r>
                     </a:p>
                   </a:txBody>
-                  <a:tcPr marL="36000" marR="21600" marT="14400" marB="14400">
+                  <a:tcPr marL="43200" marR="21600" marT="36000" marB="36000">
                     <a:solidFill>
                       <a:srgbClr val="F5F5F5"/>
                     </a:solidFill>
@@ -6451,13 +6281,733 @@
                           </a:solidFill>
                           <a:latin typeface="微软雅黑"/>
                         </a:rPr>
-                        <a:t>columns[].field（SQL / nl2sql 多行结果）/ ~dynamic~ 标记（PIVOT 动态列，列数运行时确定）</a:t>
+                        <a:t>表现：动态筛选出 status='异常' 的测点清单汇聚</a:t>
                       </a:r>
                     </a:p>
                   </a:txBody>
-                  <a:tcPr marL="36000" marR="21600" marT="14400" marB="14400">
+                  <a:tcPr marL="43200" marR="21600" marT="36000" marB="36000">
                     <a:solidFill>
                       <a:srgbClr val="F5F5F5"/>
+                    </a:solidFill>
+                  </a:tcPr>
+                </a:tc>
+              </a:tr>
+              <a:tr h="180000">
+                <a:tc>
+                  <a:txBody>
+                    <a:bodyPr wrap="square"/>
+                    <a:lstStyle/>
+                    <a:p>
+                      <a:r>
+                        <a:rPr sz="750" b="0">
+                          <a:solidFill>
+                            <a:srgbClr val="1F1F1F"/>
+                          </a:solidFill>
+                          <a:latin typeface="微软雅黑"/>
+                        </a:rPr>
+                        <a:t>目标</a:t>
+                      </a:r>
+                    </a:p>
+                  </a:txBody>
+                  <a:tcPr marL="43200" marR="21600" marT="36000" marB="36000">
+                    <a:solidFill>
+                      <a:srgbClr val="FFFFFF"/>
+                    </a:solidFill>
+                  </a:tcPr>
+                </a:tc>
+                <a:tc>
+                  <a:txBody>
+                    <a:bodyPr wrap="square"/>
+                    <a:lstStyle/>
+                    <a:p>
+                      <a:r>
+                        <a:rPr sz="750" b="0">
+                          <a:solidFill>
+                            <a:srgbClr val="1F1F1F"/>
+                          </a:solidFill>
+                          <a:latin typeface="微软雅黑"/>
+                        </a:rPr>
+                        <a:t>objective</a:t>
+                      </a:r>
+                    </a:p>
+                  </a:txBody>
+                  <a:tcPr marL="43200" marR="21600" marT="36000" marB="36000">
+                    <a:solidFill>
+                      <a:srgbClr val="FFFFFF"/>
+                    </a:solidFill>
+                  </a:tcPr>
+                </a:tc>
+                <a:tc>
+                  <a:txBody>
+                    <a:bodyPr wrap="square"/>
+                    <a:lstStyle/>
+                    <a:p>
+                      <a:r>
+                        <a:rPr sz="750" b="0">
+                          <a:solidFill>
+                            <a:srgbClr val="1F1F1F"/>
+                          </a:solidFill>
+                          <a:latin typeface="微软雅黑"/>
+                        </a:rPr>
+                        <a:t>静态设定</a:t>
+                      </a:r>
+                    </a:p>
+                  </a:txBody>
+                  <a:tcPr marL="43200" marR="21600" marT="36000" marB="36000">
+                    <a:solidFill>
+                      <a:srgbClr val="FFFFFF"/>
+                    </a:solidFill>
+                  </a:tcPr>
+                </a:tc>
+                <a:tc>
+                  <a:txBody>
+                    <a:bodyPr wrap="square"/>
+                    <a:lstStyle/>
+                    <a:p>
+                      <a:r>
+                        <a:rPr sz="750" b="0">
+                          <a:solidFill>
+                            <a:srgbClr val="1F1F1F"/>
+                          </a:solidFill>
+                          <a:latin typeface="微软雅黑"/>
+                        </a:rPr>
+                        <a:t>「对比行业维护规范给出排查建议指导」</a:t>
+                      </a:r>
+                    </a:p>
+                  </a:txBody>
+                  <a:tcPr marL="43200" marR="21600" marT="36000" marB="36000">
+                    <a:solidFill>
+                      <a:srgbClr val="FFFFFF"/>
+                    </a:solidFill>
+                  </a:tcPr>
+                </a:tc>
+              </a:tr>
+            </a:tbl>
+          </a:graphicData>
+        </a:graphic>
+      </p:graphicFrame>
+      <p:sp>
+        <p:nvSpPr>
+          <p:cNvPr id="29" name="Rectangle 28"/>
+          <p:cNvSpPr/>
+          <p:nvPr/>
+        </p:nvSpPr>
+        <p:spPr>
+          <a:xfrm>
+            <a:off x="5220000" y="3560400"/>
+            <a:ext cx="64800" cy="158400"/>
+          </a:xfrm>
+          <a:prstGeom prst="rect">
+            <a:avLst/>
+          </a:prstGeom>
+          <a:solidFill>
+            <a:srgbClr val="C7000F"/>
+          </a:solidFill>
+          <a:ln>
+            <a:noFill/>
+          </a:ln>
+        </p:spPr>
+        <p:style>
+          <a:lnRef idx="1">
+            <a:schemeClr val="accent1"/>
+          </a:lnRef>
+          <a:fillRef idx="3">
+            <a:schemeClr val="accent1"/>
+          </a:fillRef>
+          <a:effectRef idx="2">
+            <a:schemeClr val="accent1"/>
+          </a:effectRef>
+          <a:fontRef idx="minor">
+            <a:schemeClr val="lt1"/>
+          </a:fontRef>
+        </p:style>
+        <p:txBody>
+          <a:bodyPr rtlCol="0" anchor="ctr"/>
+          <a:lstStyle/>
+          <a:p>
+            <a:pPr algn="ctr"/>
+          </a:p>
+        </p:txBody>
+      </p:sp>
+      <p:sp>
+        <p:nvSpPr>
+          <p:cNvPr id="30" name="TextBox 29"/>
+          <p:cNvSpPr txBox="1"/>
+          <p:nvPr/>
+        </p:nvSpPr>
+        <p:spPr>
+          <a:xfrm>
+            <a:off x="5320800" y="3517200"/>
+            <a:ext cx="6768000" cy="208800"/>
+          </a:xfrm>
+          <a:prstGeom prst="rect">
+            <a:avLst/>
+          </a:prstGeom>
+          <a:noFill/>
+        </p:spPr>
+        <p:txBody>
+          <a:bodyPr wrap="square">
+            <a:spAutoFit/>
+          </a:bodyPr>
+          <a:lstStyle/>
+          <a:p>
+            <a:pPr algn="l">
+              <a:spcAft>
+                <a:spcPts val="200"/>
+              </a:spcAft>
+            </a:pPr>
+            <a:r>
+              <a:rPr sz="900" b="1">
+                <a:solidFill>
+                  <a:srgbClr val="C7000F"/>
+                </a:solidFill>
+                <a:latin typeface="微软雅黑"/>
+              </a:rPr>
+              <a:t>3. 布局模式：键值对栅格 (kv_grid 数据填充法则)</a:t>
+            </a:r>
+          </a:p>
+        </p:txBody>
+      </p:sp>
+      <p:graphicFrame>
+        <p:nvGraphicFramePr>
+          <p:cNvPr id="31" name="Table 30"/>
+          <p:cNvGraphicFramePr>
+            <a:graphicFrameLocks noGrp="1"/>
+          </p:cNvGraphicFramePr>
+          <p:nvPr/>
+        </p:nvGraphicFramePr>
+        <p:xfrm>
+          <a:off x="5220000" y="3744000"/>
+          <a:ext cx="6767999" cy="827999"/>
+        </p:xfrm>
+        <a:graphic>
+          <a:graphicData uri="http://schemas.openxmlformats.org/drawingml/2006/table">
+            <a:tbl>
+              <a:tblPr firstRow="1" bandRow="1">
+                <a:tableStyleId>{5C22544A-7EE6-4342-B048-85BDC9FD1C3A}</a:tableStyleId>
+              </a:tblPr>
+              <a:tblGrid>
+                <a:gridCol w="1624319"/>
+                <a:gridCol w="5143680"/>
+              </a:tblGrid>
+              <a:tr h="165599">
+                <a:tc>
+                  <a:txBody>
+                    <a:bodyPr wrap="square"/>
+                    <a:lstStyle/>
+                    <a:p>
+                      <a:r>
+                        <a:rPr sz="800" b="1">
+                          <a:solidFill>
+                            <a:srgbClr val="FFFFFF"/>
+                          </a:solidFill>
+                          <a:latin typeface="微软雅黑"/>
+                        </a:rPr>
+                        <a:t>绑定配置</a:t>
+                      </a:r>
+                    </a:p>
+                  </a:txBody>
+                  <a:tcPr marL="43200" marR="21600" marT="36000" marB="36000">
+                    <a:solidFill>
+                      <a:srgbClr val="C7000F"/>
+                    </a:solidFill>
+                  </a:tcPr>
+                </a:tc>
+                <a:tc>
+                  <a:txBody>
+                    <a:bodyPr wrap="square"/>
+                    <a:lstStyle/>
+                    <a:p>
+                      <a:r>
+                        <a:rPr sz="800" b="1">
+                          <a:solidFill>
+                            <a:srgbClr val="FFFFFF"/>
+                          </a:solidFill>
+                          <a:latin typeface="微软雅黑"/>
+                        </a:rPr>
+                        <a:t>渲染效果与用法</a:t>
+                      </a:r>
+                    </a:p>
+                  </a:txBody>
+                  <a:tcPr marL="43200" marR="21600" marT="36000" marB="36000">
+                    <a:solidFill>
+                      <a:srgbClr val="C7000F"/>
+                    </a:solidFill>
+                  </a:tcPr>
+                </a:tc>
+              </a:tr>
+              <a:tr h="165599">
+                <a:tc>
+                  <a:txBody>
+                    <a:bodyPr wrap="square"/>
+                    <a:lstStyle/>
+                    <a:p>
+                      <a:r>
+                        <a:rPr sz="800" b="0">
+                          <a:solidFill>
+                            <a:srgbClr val="1F1F1F"/>
+                          </a:solidFill>
+                          <a:latin typeface="微软雅黑"/>
+                        </a:rPr>
+                        <a:t>无 dataset_id</a:t>
+                      </a:r>
+                    </a:p>
+                  </a:txBody>
+                  <a:tcPr marL="43200" marR="21600" marT="36000" marB="36000">
+                    <a:solidFill>
+                      <a:srgbClr val="FFFFFF"/>
+                    </a:solidFill>
+                  </a:tcPr>
+                </a:tc>
+                <a:tc>
+                  <a:txBody>
+                    <a:bodyPr wrap="square"/>
+                    <a:lstStyle/>
+                    <a:p>
+                      <a:r>
+                        <a:rPr sz="800" b="0">
+                          <a:solidFill>
+                            <a:srgbClr val="1F1F1F"/>
+                          </a:solidFill>
+                          <a:latin typeface="微软雅黑"/>
+                        </a:rPr>
+                        <a:t>纯静态信息展示区，使用 fields[].value 直接渲染全局变量或输入文本</a:t>
+                      </a:r>
+                    </a:p>
+                  </a:txBody>
+                  <a:tcPr marL="43200" marR="21600" marT="36000" marB="36000">
+                    <a:solidFill>
+                      <a:srgbClr val="FFFFFF"/>
+                    </a:solidFill>
+                  </a:tcPr>
+                </a:tc>
+              </a:tr>
+              <a:tr h="165599">
+                <a:tc>
+                  <a:txBody>
+                    <a:bodyPr wrap="square"/>
+                    <a:lstStyle/>
+                    <a:p>
+                      <a:r>
+                        <a:rPr sz="800" b="0">
+                          <a:solidFill>
+                            <a:srgbClr val="1F1F1F"/>
+                          </a:solidFill>
+                          <a:latin typeface="微软雅黑"/>
+                        </a:rPr>
+                        <a:t>dataset_id</a:t>
+                      </a:r>
+                    </a:p>
+                  </a:txBody>
+                  <a:tcPr marL="43200" marR="21600" marT="36000" marB="36000">
+                    <a:solidFill>
+                      <a:srgbClr val="F5F5F5"/>
+                    </a:solidFill>
+                  </a:tcPr>
+                </a:tc>
+                <a:tc>
+                  <a:txBody>
+                    <a:bodyPr wrap="square"/>
+                    <a:lstStyle/>
+                    <a:p>
+                      <a:r>
+                        <a:rPr sz="800" b="0">
+                          <a:solidFill>
+                            <a:srgbClr val="1F1F1F"/>
+                          </a:solidFill>
+                          <a:latin typeface="微软雅黑"/>
+                        </a:rPr>
+                        <a:t>单行展示模式：使用 fields[].col，按列名从查询结果首行映射填入 KV 槽</a:t>
+                      </a:r>
+                    </a:p>
+                  </a:txBody>
+                  <a:tcPr marL="43200" marR="21600" marT="36000" marB="36000">
+                    <a:solidFill>
+                      <a:srgbClr val="F5F5F5"/>
+                    </a:solidFill>
+                  </a:tcPr>
+                </a:tc>
+              </a:tr>
+              <a:tr h="165599">
+                <a:tc>
+                  <a:txBody>
+                    <a:bodyPr wrap="square"/>
+                    <a:lstStyle/>
+                    <a:p>
+                      <a:r>
+                        <a:rPr sz="800" b="0">
+                          <a:solidFill>
+                            <a:srgbClr val="1F1F1F"/>
+                          </a:solidFill>
+                          <a:latin typeface="微软雅黑"/>
+                        </a:rPr>
+                        <a:t>dataset_id + col未声明</a:t>
+                      </a:r>
+                    </a:p>
+                  </a:txBody>
+                  <a:tcPr marL="43200" marR="21600" marT="36000" marB="36000">
+                    <a:solidFill>
+                      <a:srgbClr val="FFFFFF"/>
+                    </a:solidFill>
+                  </a:tcPr>
+                </a:tc>
+                <a:tc>
+                  <a:txBody>
+                    <a:bodyPr wrap="square"/>
+                    <a:lstStyle/>
+                    <a:p>
+                      <a:r>
+                        <a:rPr sz="800" b="0">
+                          <a:solidFill>
+                            <a:srgbClr val="1F1F1F"/>
+                          </a:solidFill>
+                          <a:latin typeface="微软雅黑"/>
+                        </a:rPr>
+                        <a:t>动态多行枚举模式：引擎按查询返回的 [key_col, value_col] 动态排版无穷长行</a:t>
+                      </a:r>
+                    </a:p>
+                  </a:txBody>
+                  <a:tcPr marL="43200" marR="21600" marT="36000" marB="36000">
+                    <a:solidFill>
+                      <a:srgbClr val="FFFFFF"/>
+                    </a:solidFill>
+                  </a:tcPr>
+                </a:tc>
+              </a:tr>
+              <a:tr h="165603">
+                <a:tc>
+                  <a:txBody>
+                    <a:bodyPr wrap="square"/>
+                    <a:lstStyle/>
+                    <a:p>
+                      <a:r>
+                        <a:rPr sz="800" b="0">
+                          <a:solidFill>
+                            <a:srgbClr val="1F1F1F"/>
+                          </a:solidFill>
+                          <a:latin typeface="微软雅黑"/>
+                        </a:rPr>
+                        <a:t>空余槽位</a:t>
+                      </a:r>
+                    </a:p>
+                  </a:txBody>
+                  <a:tcPr marL="43200" marR="21600" marT="36000" marB="36000">
+                    <a:solidFill>
+                      <a:srgbClr val="F5F5F5"/>
+                    </a:solidFill>
+                  </a:tcPr>
+                </a:tc>
+                <a:tc>
+                  <a:txBody>
+                    <a:bodyPr wrap="square"/>
+                    <a:lstStyle/>
+                    <a:p>
+                      <a:r>
+                        <a:rPr sz="800" b="0">
+                          <a:solidFill>
+                            <a:srgbClr val="1F1F1F"/>
+                          </a:solidFill>
+                          <a:latin typeface="微软雅黑"/>
+                        </a:rPr>
+                        <a:t>公式：(key_span + val_span) * cols_per_row = cols。不足时自动用空白补齐</a:t>
+                      </a:r>
+                    </a:p>
+                  </a:txBody>
+                  <a:tcPr marL="43200" marR="21600" marT="36000" marB="36000">
+                    <a:solidFill>
+                      <a:srgbClr val="F5F5F5"/>
+                    </a:solidFill>
+                  </a:tcPr>
+                </a:tc>
+              </a:tr>
+            </a:tbl>
+          </a:graphicData>
+        </a:graphic>
+      </p:graphicFrame>
+      <p:sp>
+        <p:nvSpPr>
+          <p:cNvPr id="32" name="Rectangle 31"/>
+          <p:cNvSpPr/>
+          <p:nvPr/>
+        </p:nvSpPr>
+        <p:spPr>
+          <a:xfrm>
+            <a:off x="5220000" y="4784400"/>
+            <a:ext cx="64800" cy="158400"/>
+          </a:xfrm>
+          <a:prstGeom prst="rect">
+            <a:avLst/>
+          </a:prstGeom>
+          <a:solidFill>
+            <a:srgbClr val="C7000F"/>
+          </a:solidFill>
+          <a:ln>
+            <a:noFill/>
+          </a:ln>
+        </p:spPr>
+        <p:style>
+          <a:lnRef idx="1">
+            <a:schemeClr val="accent1"/>
+          </a:lnRef>
+          <a:fillRef idx="3">
+            <a:schemeClr val="accent1"/>
+          </a:fillRef>
+          <a:effectRef idx="2">
+            <a:schemeClr val="accent1"/>
+          </a:effectRef>
+          <a:fontRef idx="minor">
+            <a:schemeClr val="lt1"/>
+          </a:fontRef>
+        </p:style>
+        <p:txBody>
+          <a:bodyPr rtlCol="0" anchor="ctr"/>
+          <a:lstStyle/>
+          <a:p>
+            <a:pPr algn="ctr"/>
+          </a:p>
+        </p:txBody>
+      </p:sp>
+      <p:sp>
+        <p:nvSpPr>
+          <p:cNvPr id="33" name="TextBox 32"/>
+          <p:cNvSpPr txBox="1"/>
+          <p:nvPr/>
+        </p:nvSpPr>
+        <p:spPr>
+          <a:xfrm>
+            <a:off x="5320800" y="4741200"/>
+            <a:ext cx="6768000" cy="208800"/>
+          </a:xfrm>
+          <a:prstGeom prst="rect">
+            <a:avLst/>
+          </a:prstGeom>
+          <a:noFill/>
+        </p:spPr>
+        <p:txBody>
+          <a:bodyPr wrap="square">
+            <a:spAutoFit/>
+          </a:bodyPr>
+          <a:lstStyle/>
+          <a:p>
+            <a:pPr algn="l">
+              <a:spcAft>
+                <a:spcPts val="200"/>
+              </a:spcAft>
+            </a:pPr>
+            <a:r>
+              <a:rPr sz="900" b="1">
+                <a:solidFill>
+                  <a:srgbClr val="C7000F"/>
+                </a:solidFill>
+                <a:latin typeface="微软雅黑"/>
+              </a:rPr>
+              <a:t>4. 布局模式：表头与明细列表 (tabular 动态能力)</a:t>
+            </a:r>
+          </a:p>
+        </p:txBody>
+      </p:sp>
+      <p:graphicFrame>
+        <p:nvGraphicFramePr>
+          <p:cNvPr id="34" name="Table 33"/>
+          <p:cNvGraphicFramePr>
+            <a:graphicFrameLocks noGrp="1"/>
+          </p:cNvGraphicFramePr>
+          <p:nvPr/>
+        </p:nvGraphicFramePr>
+        <p:xfrm>
+          <a:off x="5220000" y="4968000"/>
+          <a:ext cx="6767999" cy="648000"/>
+        </p:xfrm>
+        <a:graphic>
+          <a:graphicData uri="http://schemas.openxmlformats.org/drawingml/2006/table">
+            <a:tbl>
+              <a:tblPr firstRow="1" bandRow="1">
+                <a:tableStyleId>{5C22544A-7EE6-4342-B048-85BDC9FD1C3A}</a:tableStyleId>
+              </a:tblPr>
+              <a:tblGrid>
+                <a:gridCol w="1624319"/>
+                <a:gridCol w="5143680"/>
+              </a:tblGrid>
+              <a:tr h="162000">
+                <a:tc>
+                  <a:txBody>
+                    <a:bodyPr wrap="square"/>
+                    <a:lstStyle/>
+                    <a:p>
+                      <a:r>
+                        <a:rPr sz="800" b="1">
+                          <a:solidFill>
+                            <a:srgbClr val="FFFFFF"/>
+                          </a:solidFill>
+                          <a:latin typeface="微软雅黑"/>
+                        </a:rPr>
+                        <a:t>绑定配置</a:t>
+                      </a:r>
+                    </a:p>
+                  </a:txBody>
+                  <a:tcPr marL="43200" marR="21600" marT="36000" marB="36000">
+                    <a:solidFill>
+                      <a:srgbClr val="C7000F"/>
+                    </a:solidFill>
+                  </a:tcPr>
+                </a:tc>
+                <a:tc>
+                  <a:txBody>
+                    <a:bodyPr wrap="square"/>
+                    <a:lstStyle/>
+                    <a:p>
+                      <a:r>
+                        <a:rPr sz="800" b="1">
+                          <a:solidFill>
+                            <a:srgbClr val="FFFFFF"/>
+                          </a:solidFill>
+                          <a:latin typeface="微软雅黑"/>
+                        </a:rPr>
+                        <a:t>渲染效果与用法</a:t>
+                      </a:r>
+                    </a:p>
+                  </a:txBody>
+                  <a:tcPr marL="43200" marR="21600" marT="36000" marB="36000">
+                    <a:solidFill>
+                      <a:srgbClr val="C7000F"/>
+                    </a:solidFill>
+                  </a:tcPr>
+                </a:tc>
+              </a:tr>
+              <a:tr h="162000">
+                <a:tc>
+                  <a:txBody>
+                    <a:bodyPr wrap="square"/>
+                    <a:lstStyle/>
+                    <a:p>
+                      <a:r>
+                        <a:rPr sz="800" b="0">
+                          <a:solidFill>
+                            <a:srgbClr val="1F1F1F"/>
+                          </a:solidFill>
+                          <a:latin typeface="微软雅黑"/>
+                        </a:rPr>
+                        <a:t>常规 headers / cols</a:t>
+                      </a:r>
+                    </a:p>
+                  </a:txBody>
+                  <a:tcPr marL="43200" marR="21600" marT="36000" marB="36000">
+                    <a:solidFill>
+                      <a:srgbClr val="FFFFFF"/>
+                    </a:solidFill>
+                  </a:tcPr>
+                </a:tc>
+                <a:tc>
+                  <a:txBody>
+                    <a:bodyPr wrap="square"/>
+                    <a:lstStyle/>
+                    <a:p>
+                      <a:r>
+                        <a:rPr sz="800" b="0">
+                          <a:solidFill>
+                            <a:srgbClr val="1F1F1F"/>
+                          </a:solidFill>
+                          <a:latin typeface="微软雅黑"/>
+                        </a:rPr>
+                        <a:t>静态表头定义，直接提取 query 每行的值对应填列表格的 N 列空间</a:t>
+                      </a:r>
+                    </a:p>
+                  </a:txBody>
+                  <a:tcPr marL="43200" marR="21600" marT="36000" marB="36000">
+                    <a:solidFill>
+                      <a:srgbClr val="FFFFFF"/>
+                    </a:solidFill>
+                  </a:tcPr>
+                </a:tc>
+              </a:tr>
+              <a:tr h="162000">
+                <a:tc>
+                  <a:txBody>
+                    <a:bodyPr wrap="square"/>
+                    <a:lstStyle/>
+                    <a:p>
+                      <a:r>
+                        <a:rPr sz="800" b="0">
+                          <a:solidFill>
+                            <a:srgbClr val="1F1F1F"/>
+                          </a:solidFill>
+                          <a:latin typeface="微软雅黑"/>
+                        </a:rPr>
+                        <a:t>~dynamic~ 映射符</a:t>
+                      </a:r>
+                    </a:p>
+                  </a:txBody>
+                  <a:tcPr marL="43200" marR="21600" marT="36000" marB="36000">
+                    <a:solidFill>
+                      <a:srgbClr val="F5F5F5"/>
+                    </a:solidFill>
+                  </a:tcPr>
+                </a:tc>
+                <a:tc>
+                  <a:txBody>
+                    <a:bodyPr wrap="square"/>
+                    <a:lstStyle/>
+                    <a:p>
+                      <a:r>
+                        <a:rPr sz="800" b="0">
+                          <a:solidFill>
+                            <a:srgbClr val="1F1F1F"/>
+                          </a:solidFill>
+                          <a:latin typeface="微软雅黑"/>
+                        </a:rPr>
+                        <a:t>当 query 为 PIVOT 透视动态多设备结果时引入。系统自动捕捉未声明列并克隆映射</a:t>
+                      </a:r>
+                    </a:p>
+                  </a:txBody>
+                  <a:tcPr marL="43200" marR="21600" marT="36000" marB="36000">
+                    <a:solidFill>
+                      <a:srgbClr val="F5F5F5"/>
+                    </a:solidFill>
+                  </a:tcPr>
+                </a:tc>
+              </a:tr>
+              <a:tr h="162000">
+                <a:tc>
+                  <a:txBody>
+                    <a:bodyPr wrap="square"/>
+                    <a:lstStyle/>
+                    <a:p>
+                      <a:r>
+                        <a:rPr sz="800" b="0">
+                          <a:solidFill>
+                            <a:srgbClr val="1F1F1F"/>
+                          </a:solidFill>
+                          <a:latin typeface="微软雅黑"/>
+                        </a:rPr>
+                        <a:t>重复跨度 rule</a:t>
+                      </a:r>
+                    </a:p>
+                  </a:txBody>
+                  <a:tcPr marL="43200" marR="21600" marT="36000" marB="36000">
+                    <a:solidFill>
+                      <a:srgbClr val="FFFFFF"/>
+                    </a:solidFill>
+                  </a:tcPr>
+                </a:tc>
+                <a:tc>
+                  <a:txBody>
+                    <a:bodyPr wrap="square"/>
+                    <a:lstStyle/>
+                    <a:p>
+                      <a:r>
+                        <a:rPr sz="800" b="0">
+                          <a:solidFill>
+                            <a:srgbClr val="1F1F1F"/>
+                          </a:solidFill>
+                          <a:latin typeface="微软雅黑"/>
+                        </a:rPr>
+                        <a:t>headers_span 之和必须严格等于表格声明的 Columns 总宽度配置，否则报错</a:t>
+                      </a:r>
+                    </a:p>
+                  </a:txBody>
+                  <a:tcPr marL="43200" marR="21600" marT="36000" marB="36000">
+                    <a:solidFill>
+                      <a:srgbClr val="FFFFFF"/>
                     </a:solidFill>
                   </a:tcPr>
                 </a:tc>

--- a/output/report_template_structure.pptx
+++ b/output/report_template_structure.pptx
@@ -3512,6 +3512,9 @@
       ├── foreach: object
       │    ├── param: string    (绑定的已收集多值参数)
       │    └── as: string       (迭代变量名 {$varname})
+      ├── outline: object       (★ v2.0 参数化意图蓝图)
+      │    ├── document: string (带 {@id} 插槽的连贯意图文本)
+      │    └── blocks[]: array  (定义占位符为 threshold/operator 等参数)
       ├── subsections[]: array  (子章节嵌套)
       │    └── ...
       └── content: object       (章节叶子节点)
